--- a/docs/slides/llm_fuzzing_review.pptx
+++ b/docs/slides/llm_fuzzing_review.pptx
@@ -26,6 +26,11 @@
     <p:sldId id="274" r:id="rId25"/>
     <p:sldId id="275" r:id="rId26"/>
     <p:sldId id="276" r:id="rId27"/>
+    <p:sldId id="277" r:id="rId28"/>
+    <p:sldId id="278" r:id="rId29"/>
+    <p:sldId id="279" r:id="rId30"/>
+    <p:sldId id="280" r:id="rId31"/>
+    <p:sldId id="281" r:id="rId32"/>
   </p:sldIdLst>
   <p:sldSz cx="12191695" cy="6858000" type="screen4x3"/>
   <p:notesSz cx="6858000" cy="9144000"/>
@@ -3254,6 +3259,1549 @@
           <a:p>
             <a:r>
               <a:rPr sz="3200" b="1"/>
+              <a:t>Exp1 prompt in practice — what the LLM sees (abridged)</a:t>
+            </a:r>
+          </a:p>
+        </p:txBody>
+      </p:sp>
+      <p:sp>
+        <p:nvSpPr>
+          <p:cNvPr id="3" name="TextBox 2"/>
+          <p:cNvSpPr txBox="1"/>
+          <p:nvPr/>
+        </p:nvSpPr>
+        <p:spPr>
+          <a:xfrm>
+            <a:off x="457200" y="1051560"/>
+            <a:ext cx="11247120" cy="457200"/>
+          </a:xfrm>
+          <a:prstGeom prst="rect">
+            <a:avLst/>
+          </a:prstGeom>
+          <a:noFill/>
+        </p:spPr>
+        <p:txBody>
+          <a:bodyPr wrap="none">
+            <a:spAutoFit/>
+          </a:bodyPr>
+          <a:lstStyle/>
+          <a:p>
+            <a:r>
+              <a:rPr sz="1600" b="0"/>
+              <a:t>Template: synthesis/prompts/input_synthesis_regex.j2</a:t>
+            </a:r>
+          </a:p>
+        </p:txBody>
+      </p:sp>
+      <p:sp>
+        <p:nvSpPr>
+          <p:cNvPr id="4" name="TextBox 3"/>
+          <p:cNvSpPr txBox="1"/>
+          <p:nvPr/>
+        </p:nvSpPr>
+        <p:spPr>
+          <a:xfrm>
+            <a:off x="548640" y="1645920"/>
+            <a:ext cx="11155680" cy="4846320"/>
+          </a:xfrm>
+          <a:prstGeom prst="rect">
+            <a:avLst/>
+          </a:prstGeom>
+          <a:noFill/>
+        </p:spPr>
+        <p:txBody>
+          <a:bodyPr wrap="square">
+            <a:spAutoFit/>
+          </a:bodyPr>
+          <a:lstStyle/>
+          <a:p>
+            <a:pPr>
+              <a:spcAft>
+                <a:spcPts val="600"/>
+              </a:spcAft>
+            </a:pPr>
+            <a:r>
+              <a:rPr sz="1300"/>
+              <a:t>You are generating REGEX PATTERNS to exercise uncovered branches in RE2 ...</a:t>
+            </a:r>
+          </a:p>
+          <a:p>
+            <a:pPr>
+              <a:spcAft>
+                <a:spcPts val="600"/>
+              </a:spcAft>
+            </a:pPr>
+            <a:r>
+              <a:rPr sz="1300"/>
+              <a:t/>
+            </a:r>
+          </a:p>
+          <a:p>
+            <a:pPr>
+              <a:spcAft>
+                <a:spcPts val="600"/>
+              </a:spcAft>
+            </a:pPr>
+            <a:r>
+              <a:rPr sz="1300"/>
+              <a:t>=== HARNESS FORMAT ===</a:t>
+            </a:r>
+          </a:p>
+          <a:p>
+            <a:pPr>
+              <a:spcAft>
+                <a:spcPts val="600"/>
+              </a:spcAft>
+            </a:pPr>
+            <a:r>
+              <a:rPr sz="1300"/>
+              <a:t>The libFuzzer harness consumes [2 flag bytes][regex string bytes] and invokes RE2::Compile.</a:t>
+            </a:r>
+          </a:p>
+          <a:p>
+            <a:pPr>
+              <a:spcAft>
+                <a:spcPts val="600"/>
+              </a:spcAft>
+            </a:pPr>
+            <a:r>
+              <a:rPr sz="1300"/>
+              <a:t>YOUR JOB: produce the REGEX STRING ONLY, plain UTF-8. DO NOT base64-encode.</a:t>
+            </a:r>
+          </a:p>
+          <a:p>
+            <a:pPr>
+              <a:spcAft>
+                <a:spcPts val="600"/>
+              </a:spcAft>
+            </a:pPr>
+            <a:r>
+              <a:rPr sz="1300"/>
+              <a:t/>
+            </a:r>
+          </a:p>
+          <a:p>
+            <a:pPr>
+              <a:spcAft>
+                <a:spcPts val="600"/>
+              </a:spcAft>
+            </a:pPr>
+            <a:r>
+              <a:rPr sz="1300"/>
+              <a:t>=== UPSTREAM TESTS (few-shot) ===</a:t>
+            </a:r>
+          </a:p>
+          <a:p>
+            <a:pPr>
+              <a:spcAft>
+                <a:spcPts val="600"/>
+              </a:spcAft>
+            </a:pPr>
+            <a:r>
+              <a:rPr sz="1300"/>
+              <a:t>From re2/testing/regexp_test.cc:54:</a:t>
+            </a:r>
+          </a:p>
+          <a:p>
+            <a:pPr>
+              <a:spcAft>
+                <a:spcPts val="600"/>
+              </a:spcAft>
+            </a:pPr>
+            <a:r>
+              <a:rPr sz="1300"/>
+              <a:t>    TEST(Regexp, BigRef) { Regexp* re = Regexp::Parse("(a|b)*", ...); ... }</a:t>
+            </a:r>
+          </a:p>
+          <a:p>
+            <a:pPr>
+              <a:spcAft>
+                <a:spcPts val="600"/>
+              </a:spcAft>
+            </a:pPr>
+            <a:r>
+              <a:rPr sz="1300"/>
+              <a:t/>
+            </a:r>
+          </a:p>
+          <a:p>
+            <a:pPr>
+              <a:spcAft>
+                <a:spcPts val="600"/>
+              </a:spcAft>
+            </a:pPr>
+            <a:r>
+              <a:rPr sz="1300"/>
+              <a:t>=== UNCOVERED BRANCHES ===</a:t>
+            </a:r>
+          </a:p>
+          <a:p>
+            <a:pPr>
+              <a:spcAft>
+                <a:spcPts val="600"/>
+              </a:spcAft>
+            </a:pPr>
+            <a:r>
+              <a:rPr sz="1300"/>
+              <a:t>Gap 1:  re2/bitstate.cc:112</a:t>
+            </a:r>
+          </a:p>
+          <a:p>
+            <a:pPr>
+              <a:spcAft>
+                <a:spcPts val="600"/>
+              </a:spcAft>
+            </a:pPr>
+            <a:r>
+              <a:rPr sz="1300"/>
+              <a:t>Code:   if (njob_ &gt;= maxjob_) { LOG(DFATAL) &lt;&lt; "Job stack overflow"; return false; }</a:t>
+            </a:r>
+          </a:p>
+          <a:p>
+            <a:pPr>
+              <a:spcAft>
+                <a:spcPts val="600"/>
+              </a:spcAft>
+            </a:pPr>
+            <a:r>
+              <a:rPr sz="1300"/>
+              <a:t>Hint:   requires the following to evaluate toward the uncovered branch ...</a:t>
+            </a:r>
+          </a:p>
+          <a:p>
+            <a:pPr>
+              <a:spcAft>
+                <a:spcPts val="600"/>
+              </a:spcAft>
+            </a:pPr>
+            <a:r>
+              <a:rPr sz="1300"/>
+              <a:t/>
+            </a:r>
+          </a:p>
+          <a:p>
+            <a:pPr>
+              <a:spcAft>
+                <a:spcPts val="600"/>
+              </a:spcAft>
+            </a:pPr>
+            <a:r>
+              <a:rPr sz="1300"/>
+              <a:t>Gap 2:  re2/parse.cc:2417    (Unicode class parser branch)</a:t>
+            </a:r>
+          </a:p>
+          <a:p>
+            <a:pPr>
+              <a:spcAft>
+                <a:spcPts val="600"/>
+              </a:spcAft>
+            </a:pPr>
+            <a:r>
+              <a:rPr sz="1300"/>
+              <a:t>Gap 3:  re2/compile.cc:311   (counted-repetition expansion limit)</a:t>
+            </a:r>
+          </a:p>
+          <a:p>
+            <a:pPr>
+              <a:spcAft>
+                <a:spcPts val="600"/>
+              </a:spcAft>
+            </a:pPr>
+            <a:r>
+              <a:rPr sz="1300"/>
+              <a:t>... (≤ max_gaps entries, ordered by reachability score) ...</a:t>
+            </a:r>
+          </a:p>
+          <a:p>
+            <a:pPr>
+              <a:spcAft>
+                <a:spcPts val="600"/>
+              </a:spcAft>
+            </a:pPr>
+            <a:r>
+              <a:rPr sz="1300"/>
+              <a:t/>
+            </a:r>
+          </a:p>
+          <a:p>
+            <a:pPr>
+              <a:spcAft>
+                <a:spcPts val="600"/>
+              </a:spcAft>
+            </a:pPr>
+            <a:r>
+              <a:rPr sz="1300"/>
+              <a:t>=== YOUR TASK ===   Produce N distinct regex patterns 1-60 chars. Emit one JSON object.</a:t>
+            </a:r>
+          </a:p>
+        </p:txBody>
+      </p:sp>
+    </p:spTree>
+  </p:cSld>
+  <p:clrMapOvr>
+    <a:masterClrMapping/>
+  </p:clrMapOvr>
+</p:sld>
+</file>
+
+<file path=ppt/slides/slide11.xml><?xml version="1.0" encoding="utf-8"?>
+<p:sld xmlns:a="http://schemas.openxmlformats.org/drawingml/2006/main" xmlns:p="http://schemas.openxmlformats.org/presentationml/2006/main" xmlns:r="http://schemas.openxmlformats.org/officeDocument/2006/relationships">
+  <p:cSld>
+    <p:spTree>
+      <p:nvGrpSpPr>
+        <p:cNvPr id="1" name=""/>
+        <p:cNvGrpSpPr/>
+        <p:nvPr/>
+      </p:nvGrpSpPr>
+      <p:grpSpPr/>
+      <p:sp>
+        <p:nvSpPr>
+          <p:cNvPr id="2" name="TextBox 1"/>
+          <p:cNvSpPr txBox="1"/>
+          <p:nvPr/>
+        </p:nvSpPr>
+        <p:spPr>
+          <a:xfrm>
+            <a:off x="457200" y="274320"/>
+            <a:ext cx="11247120" cy="822960"/>
+          </a:xfrm>
+          <a:prstGeom prst="rect">
+            <a:avLst/>
+          </a:prstGeom>
+          <a:noFill/>
+        </p:spPr>
+        <p:txBody>
+          <a:bodyPr wrap="none">
+            <a:spAutoFit/>
+          </a:bodyPr>
+          <a:lstStyle/>
+          <a:p>
+            <a:r>
+              <a:rPr sz="3200" b="1"/>
+              <a:t>Exp2 prompt in practice — what the LLM sees (abridged)</a:t>
+            </a:r>
+          </a:p>
+        </p:txBody>
+      </p:sp>
+      <p:sp>
+        <p:nvSpPr>
+          <p:cNvPr id="3" name="TextBox 2"/>
+          <p:cNvSpPr txBox="1"/>
+          <p:nvPr/>
+        </p:nvSpPr>
+        <p:spPr>
+          <a:xfrm>
+            <a:off x="457200" y="1051560"/>
+            <a:ext cx="11247120" cy="457200"/>
+          </a:xfrm>
+          <a:prstGeom prst="rect">
+            <a:avLst/>
+          </a:prstGeom>
+          <a:noFill/>
+        </p:spPr>
+        <p:txBody>
+          <a:bodyPr wrap="none">
+            <a:spAutoFit/>
+          </a:bodyPr>
+          <a:lstStyle/>
+          <a:p>
+            <a:r>
+              <a:rPr sz="1600" b="0"/>
+              <a:t>Template: synthesis/prompts/source_only_synthesis_regex.j2  (assert_no_tests guard on)</a:t>
+            </a:r>
+          </a:p>
+        </p:txBody>
+      </p:sp>
+      <p:sp>
+        <p:nvSpPr>
+          <p:cNvPr id="4" name="TextBox 3"/>
+          <p:cNvSpPr txBox="1"/>
+          <p:nvPr/>
+        </p:nvSpPr>
+        <p:spPr>
+          <a:xfrm>
+            <a:off x="548640" y="1645920"/>
+            <a:ext cx="11155680" cy="4846320"/>
+          </a:xfrm>
+          <a:prstGeom prst="rect">
+            <a:avLst/>
+          </a:prstGeom>
+          <a:noFill/>
+        </p:spPr>
+        <p:txBody>
+          <a:bodyPr wrap="square">
+            <a:spAutoFit/>
+          </a:bodyPr>
+          <a:lstStyle/>
+          <a:p>
+            <a:pPr>
+              <a:spcAft>
+                <a:spcPts val="600"/>
+              </a:spcAft>
+            </a:pPr>
+            <a:r>
+              <a:rPr sz="1300"/>
+              <a:t>You are generating REGEX PATTERNS to maximize coverage in RE2 ...</a:t>
+            </a:r>
+          </a:p>
+          <a:p>
+            <a:pPr>
+              <a:spcAft>
+                <a:spcPts val="600"/>
+              </a:spcAft>
+            </a:pPr>
+            <a:r>
+              <a:rPr sz="1300"/>
+              <a:t>You have ONLY the source code and the fuzzer harness — no tests, no coverage data.</a:t>
+            </a:r>
+          </a:p>
+          <a:p>
+            <a:pPr>
+              <a:spcAft>
+                <a:spcPts val="600"/>
+              </a:spcAft>
+            </a:pPr>
+            <a:r>
+              <a:rPr sz="1300"/>
+              <a:t/>
+            </a:r>
+          </a:p>
+          <a:p>
+            <a:pPr>
+              <a:spcAft>
+                <a:spcPts val="600"/>
+              </a:spcAft>
+            </a:pPr>
+            <a:r>
+              <a:rPr sz="1300"/>
+              <a:t>=== HARNESS FORMAT ===   [identical to exp1]</a:t>
+            </a:r>
+          </a:p>
+          <a:p>
+            <a:pPr>
+              <a:spcAft>
+                <a:spcPts val="600"/>
+              </a:spcAft>
+            </a:pPr>
+            <a:r>
+              <a:rPr sz="1300"/>
+              <a:t/>
+            </a:r>
+          </a:p>
+          <a:p>
+            <a:pPr>
+              <a:spcAft>
+                <a:spcPts val="600"/>
+              </a:spcAft>
+            </a:pPr>
+            <a:r>
+              <a:rPr sz="1300"/>
+              <a:t>[LIBRARY SOURCE CODE]</a:t>
+            </a:r>
+          </a:p>
+          <a:p>
+            <a:pPr>
+              <a:spcAft>
+                <a:spcPts val="600"/>
+              </a:spcAft>
+            </a:pPr>
+            <a:r>
+              <a:rPr sz="1300"/>
+              <a:t>=== re2/parse.cc ===</a:t>
+            </a:r>
+          </a:p>
+          <a:p>
+            <a:pPr>
+              <a:spcAft>
+                <a:spcPts val="600"/>
+              </a:spcAft>
+            </a:pPr>
+            <a:r>
+              <a:rPr sz="1300"/>
+              <a:t>    // ~800 LOC of the regex parser:  OpRegexp ParseEscape(Rune* rp, ...) { ... }</a:t>
+            </a:r>
+          </a:p>
+          <a:p>
+            <a:pPr>
+              <a:spcAft>
+                <a:spcPts val="600"/>
+              </a:spcAft>
+            </a:pPr>
+            <a:r>
+              <a:rPr sz="1300"/>
+              <a:t/>
+            </a:r>
+          </a:p>
+          <a:p>
+            <a:pPr>
+              <a:spcAft>
+                <a:spcPts val="600"/>
+              </a:spcAft>
+            </a:pPr>
+            <a:r>
+              <a:rPr sz="1300"/>
+              <a:t>=== re2/regexp.cc ===</a:t>
+            </a:r>
+          </a:p>
+          <a:p>
+            <a:pPr>
+              <a:spcAft>
+                <a:spcPts val="600"/>
+              </a:spcAft>
+            </a:pPr>
+            <a:r>
+              <a:rPr sz="1300"/>
+              <a:t>    // ~500 LOC:  Regexp* Regexp::Parse(const StringPiece&amp; s, ParseFlags flags, ...)</a:t>
+            </a:r>
+          </a:p>
+          <a:p>
+            <a:pPr>
+              <a:spcAft>
+                <a:spcPts val="600"/>
+              </a:spcAft>
+            </a:pPr>
+            <a:r>
+              <a:rPr sz="1300"/>
+              <a:t/>
+            </a:r>
+          </a:p>
+          <a:p>
+            <a:pPr>
+              <a:spcAft>
+                <a:spcPts val="600"/>
+              </a:spcAft>
+            </a:pPr>
+            <a:r>
+              <a:rPr sz="1300"/>
+              <a:t>=== re2/compile.cc ===     ...</a:t>
+            </a:r>
+          </a:p>
+          <a:p>
+            <a:pPr>
+              <a:spcAft>
+                <a:spcPts val="600"/>
+              </a:spcAft>
+            </a:pPr>
+            <a:r>
+              <a:rPr sz="1300"/>
+              <a:t>=== re2/simplify.cc ===    ...</a:t>
+            </a:r>
+          </a:p>
+          <a:p>
+            <a:pPr>
+              <a:spcAft>
+                <a:spcPts val="600"/>
+              </a:spcAft>
+            </a:pPr>
+            <a:r>
+              <a:rPr sz="1300"/>
+              <a:t/>
+            </a:r>
+          </a:p>
+          <a:p>
+            <a:pPr>
+              <a:spcAft>
+                <a:spcPts val="600"/>
+              </a:spcAft>
+            </a:pPr>
+            <a:r>
+              <a:rPr sz="1300"/>
+              <a:t>(--source-max-files 4   --source-token-budget 14000; files picked by call-graph priority)</a:t>
+            </a:r>
+          </a:p>
+          <a:p>
+            <a:pPr>
+              <a:spcAft>
+                <a:spcPts val="600"/>
+              </a:spcAft>
+            </a:pPr>
+            <a:r>
+              <a:rPr sz="1300"/>
+              <a:t/>
+            </a:r>
+          </a:p>
+          <a:p>
+            <a:pPr>
+              <a:spcAft>
+                <a:spcPts val="600"/>
+              </a:spcAft>
+            </a:pPr>
+            <a:r>
+              <a:rPr sz="1300"/>
+              <a:t>=== YOUR TASK ===   Produce N distinct regex patterns. Prioritize DEPTH over BREADTH.</a:t>
+            </a:r>
+          </a:p>
+        </p:txBody>
+      </p:sp>
+    </p:spTree>
+  </p:cSld>
+  <p:clrMapOvr>
+    <a:masterClrMapping/>
+  </p:clrMapOvr>
+</p:sld>
+</file>
+
+<file path=ppt/slides/slide12.xml><?xml version="1.0" encoding="utf-8"?>
+<p:sld xmlns:a="http://schemas.openxmlformats.org/drawingml/2006/main" xmlns:p="http://schemas.openxmlformats.org/presentationml/2006/main" xmlns:r="http://schemas.openxmlformats.org/officeDocument/2006/relationships">
+  <p:cSld>
+    <p:spTree>
+      <p:nvGrpSpPr>
+        <p:cNvPr id="1" name=""/>
+        <p:cNvGrpSpPr/>
+        <p:nvPr/>
+      </p:nvGrpSpPr>
+      <p:grpSpPr/>
+      <p:sp>
+        <p:nvSpPr>
+          <p:cNvPr id="2" name="TextBox 1"/>
+          <p:cNvSpPr txBox="1"/>
+          <p:nvPr/>
+        </p:nvSpPr>
+        <p:spPr>
+          <a:xfrm>
+            <a:off x="457200" y="274320"/>
+            <a:ext cx="11247120" cy="822960"/>
+          </a:xfrm>
+          <a:prstGeom prst="rect">
+            <a:avLst/>
+          </a:prstGeom>
+          <a:noFill/>
+        </p:spPr>
+        <p:txBody>
+          <a:bodyPr wrap="none">
+            <a:spAutoFit/>
+          </a:bodyPr>
+          <a:lstStyle/>
+          <a:p>
+            <a:r>
+              <a:rPr sz="3200" b="1"/>
+              <a:t>What the LLM returns, and what becomes a seed</a:t>
+            </a:r>
+          </a:p>
+        </p:txBody>
+      </p:sp>
+      <p:sp>
+        <p:nvSpPr>
+          <p:cNvPr id="3" name="TextBox 2"/>
+          <p:cNvSpPr txBox="1"/>
+          <p:nvPr/>
+        </p:nvSpPr>
+        <p:spPr>
+          <a:xfrm>
+            <a:off x="457200" y="1051560"/>
+            <a:ext cx="11247120" cy="457200"/>
+          </a:xfrm>
+          <a:prstGeom prst="rect">
+            <a:avLst/>
+          </a:prstGeom>
+          <a:noFill/>
+        </p:spPr>
+        <p:txBody>
+          <a:bodyPr wrap="none">
+            <a:spAutoFit/>
+          </a:bodyPr>
+          <a:lstStyle/>
+          <a:p>
+            <a:r>
+              <a:rPr sz="1600" b="0"/>
+              <a:t>Real output from phase3_results/…/exp1/llama-3.1-8b-instruct/sample_0.json</a:t>
+            </a:r>
+          </a:p>
+        </p:txBody>
+      </p:sp>
+      <p:sp>
+        <p:nvSpPr>
+          <p:cNvPr id="4" name="TextBox 3"/>
+          <p:cNvSpPr txBox="1"/>
+          <p:nvPr/>
+        </p:nvSpPr>
+        <p:spPr>
+          <a:xfrm>
+            <a:off x="548640" y="1645920"/>
+            <a:ext cx="11155680" cy="4846320"/>
+          </a:xfrm>
+          <a:prstGeom prst="rect">
+            <a:avLst/>
+          </a:prstGeom>
+          <a:noFill/>
+        </p:spPr>
+        <p:txBody>
+          <a:bodyPr wrap="square">
+            <a:spAutoFit/>
+          </a:bodyPr>
+          <a:lstStyle/>
+          <a:p>
+            <a:pPr>
+              <a:spcAft>
+                <a:spcPts val="600"/>
+              </a:spcAft>
+            </a:pPr>
+            <a:r>
+              <a:rPr sz="1200"/>
+              <a:t>Raw JSON from the model:</a:t>
+            </a:r>
+          </a:p>
+          <a:p>
+            <a:pPr>
+              <a:spcAft>
+                <a:spcPts val="600"/>
+              </a:spcAft>
+            </a:pPr>
+            <a:r>
+              <a:rPr sz="1200"/>
+              <a:t>{</a:t>
+            </a:r>
+          </a:p>
+          <a:p>
+            <a:pPr>
+              <a:spcAft>
+                <a:spcPts val="600"/>
+              </a:spcAft>
+            </a:pPr>
+            <a:r>
+              <a:rPr sz="1200"/>
+              <a:t>  "regexes": [</a:t>
+            </a:r>
+          </a:p>
+          <a:p>
+            <a:pPr>
+              <a:spcAft>
+                <a:spcPts val="600"/>
+              </a:spcAft>
+            </a:pPr>
+            <a:r>
+              <a:rPr sz="1200"/>
+              <a:t>    { "regex": "\\u{1234}+",   "target_gaps": ["re2/bitstate.cc:112"],  "reasoning": "Unicode escape, stack growth" },</a:t>
+            </a:r>
+          </a:p>
+          <a:p>
+            <a:pPr>
+              <a:spcAft>
+                <a:spcPts val="600"/>
+              </a:spcAft>
+            </a:pPr>
+            <a:r>
+              <a:rPr sz="1200"/>
+              <a:t>    { "regex": "(a*)*",         "target_gaps": ["re2/bitstate.cc:121"],  "reasoning": "Nested repetitions may overflow stack" },</a:t>
+            </a:r>
+          </a:p>
+          <a:p>
+            <a:pPr>
+              <a:spcAft>
+                <a:spcPts val="600"/>
+              </a:spcAft>
+            </a:pPr>
+            <a:r>
+              <a:rPr sz="1200"/>
+              <a:t>    { "regex": "[^a-zA-Z0-9]+", "target_gaps": ["re2/bitstate.cc:126"],  "reasoning": "Large character class" },</a:t>
+            </a:r>
+          </a:p>
+          <a:p>
+            <a:pPr>
+              <a:spcAft>
+                <a:spcPts val="600"/>
+              </a:spcAft>
+            </a:pPr>
+            <a:r>
+              <a:rPr sz="1200"/>
+              <a:t>    { "regex": "(?P&lt;g1&gt;a+)",    "target_gaps": ["re2/bitstate.cc:131"],  "reasoning": "Named captures" },</a:t>
+            </a:r>
+          </a:p>
+          <a:p>
+            <a:pPr>
+              <a:spcAft>
+                <a:spcPts val="600"/>
+              </a:spcAft>
+            </a:pPr>
+            <a:r>
+              <a:rPr sz="1200"/>
+              <a:t>    { "regex": "a{1000,}",      "target_gaps": ["re2/compile.cc:311"],   "reasoning": "Large counted reps" }</a:t>
+            </a:r>
+          </a:p>
+          <a:p>
+            <a:pPr>
+              <a:spcAft>
+                <a:spcPts val="600"/>
+              </a:spcAft>
+            </a:pPr>
+            <a:r>
+              <a:rPr sz="1200"/>
+              <a:t>  ]</a:t>
+            </a:r>
+          </a:p>
+          <a:p>
+            <a:pPr>
+              <a:spcAft>
+                <a:spcPts val="600"/>
+              </a:spcAft>
+            </a:pPr>
+            <a:r>
+              <a:rPr sz="1200"/>
+              <a:t>}</a:t>
+            </a:r>
+          </a:p>
+          <a:p>
+            <a:pPr>
+              <a:spcAft>
+                <a:spcPts val="600"/>
+              </a:spcAft>
+            </a:pPr>
+            <a:r>
+              <a:rPr sz="1200"/>
+              <a:t/>
+            </a:r>
+          </a:p>
+          <a:p>
+            <a:pPr>
+              <a:spcAft>
+                <a:spcPts val="600"/>
+              </a:spcAft>
+            </a:pPr>
+            <a:r>
+              <a:rPr sz="1200"/>
+              <a:t>parse_regex_response() then emits one seed file per entry  ([2 flag bytes][UTF-8 regex]):</a:t>
+            </a:r>
+          </a:p>
+          <a:p>
+            <a:pPr>
+              <a:spcAft>
+                <a:spcPts val="600"/>
+              </a:spcAft>
+            </a:pPr>
+            <a:r>
+              <a:rPr sz="1200"/>
+              <a:t>  seeds/re2/exp1/.../seed_b6c1…bin :  6D 29  \u{1234}+          ← 11 bytes</a:t>
+            </a:r>
+          </a:p>
+          <a:p>
+            <a:pPr>
+              <a:spcAft>
+                <a:spcPts val="600"/>
+              </a:spcAft>
+            </a:pPr>
+            <a:r>
+              <a:rPr sz="1200"/>
+              <a:t>  seeds/re2/exp1/.../seed_bd18…bin :  5A 2A  (a*)*              ←  7 bytes</a:t>
+            </a:r>
+          </a:p>
+          <a:p>
+            <a:pPr>
+              <a:spcAft>
+                <a:spcPts val="600"/>
+              </a:spcAft>
+            </a:pPr>
+            <a:r>
+              <a:rPr sz="1200"/>
+              <a:t>  seeds/re2/exp1/.../seed_12c0…bin :  F4 E2  [^a-zA-Z0-9]+      ← 15 bytes</a:t>
+            </a:r>
+          </a:p>
+          <a:p>
+            <a:pPr>
+              <a:spcAft>
+                <a:spcPts val="600"/>
+              </a:spcAft>
+            </a:pPr>
+            <a:r>
+              <a:rPr sz="1200"/>
+              <a:t>  seeds/re2/exp1/.../seed_b3e5…bin :  DC E3  (?P&lt;g1&gt;a+)         ← 12 bytes</a:t>
+            </a:r>
+          </a:p>
+          <a:p>
+            <a:pPr>
+              <a:spcAft>
+                <a:spcPts val="600"/>
+              </a:spcAft>
+            </a:pPr>
+            <a:r>
+              <a:rPr sz="1200"/>
+              <a:t>  seeds/re2/exp1/.../seed_1de0…bin :  09 D3  a{1000,}           ← 10 bytes</a:t>
+            </a:r>
+          </a:p>
+          <a:p>
+            <a:pPr>
+              <a:spcAft>
+                <a:spcPts val="600"/>
+              </a:spcAft>
+            </a:pPr>
+            <a:r>
+              <a:rPr sz="1200"/>
+              <a:t/>
+            </a:r>
+          </a:p>
+          <a:p>
+            <a:pPr>
+              <a:spcAft>
+                <a:spcPts val="600"/>
+              </a:spcAft>
+            </a:pPr>
+            <a:r>
+              <a:rPr sz="1200"/>
+              <a:t>Flag bytes are sha256(target, sample_idx, regex_idx, regex)[:2] — deterministic, not random.</a:t>
+            </a:r>
+          </a:p>
+        </p:txBody>
+      </p:sp>
+    </p:spTree>
+  </p:cSld>
+  <p:clrMapOvr>
+    <a:masterClrMapping/>
+  </p:clrMapOvr>
+</p:sld>
+</file>
+
+<file path=ppt/slides/slide13.xml><?xml version="1.0" encoding="utf-8"?>
+<p:sld xmlns:a="http://schemas.openxmlformats.org/drawingml/2006/main" xmlns:p="http://schemas.openxmlformats.org/presentationml/2006/main" xmlns:r="http://schemas.openxmlformats.org/officeDocument/2006/relationships">
+  <p:cSld>
+    <p:spTree>
+      <p:nvGrpSpPr>
+        <p:cNvPr id="1" name=""/>
+        <p:cNvGrpSpPr/>
+        <p:nvPr/>
+      </p:nvGrpSpPr>
+      <p:grpSpPr/>
+      <p:sp>
+        <p:nvSpPr>
+          <p:cNvPr id="2" name="TextBox 1"/>
+          <p:cNvSpPr txBox="1"/>
+          <p:nvPr/>
+        </p:nvSpPr>
+        <p:spPr>
+          <a:xfrm>
+            <a:off x="457200" y="274320"/>
+            <a:ext cx="11247120" cy="822960"/>
+          </a:xfrm>
+          <a:prstGeom prst="rect">
+            <a:avLst/>
+          </a:prstGeom>
+          <a:noFill/>
+        </p:spPr>
+        <p:txBody>
+          <a:bodyPr wrap="none">
+            <a:spAutoFit/>
+          </a:bodyPr>
+          <a:lstStyle/>
+          <a:p>
+            <a:r>
+              <a:rPr sz="3200" b="1"/>
+              <a:t>Second A/B result — regex-format prompt (2026-04-13)</a:t>
+            </a:r>
+          </a:p>
+        </p:txBody>
+      </p:sp>
+      <p:sp>
+        <p:nvSpPr>
+          <p:cNvPr id="3" name="TextBox 2"/>
+          <p:cNvSpPr txBox="1"/>
+          <p:nvPr/>
+        </p:nvSpPr>
+        <p:spPr>
+          <a:xfrm>
+            <a:off x="457200" y="1051560"/>
+            <a:ext cx="11247120" cy="457200"/>
+          </a:xfrm>
+          <a:prstGeom prst="rect">
+            <a:avLst/>
+          </a:prstGeom>
+          <a:noFill/>
+        </p:spPr>
+        <p:txBody>
+          <a:bodyPr wrap="none">
+            <a:spAutoFit/>
+          </a:bodyPr>
+          <a:lstStyle/>
+          <a:p>
+            <a:r>
+              <a:rPr sz="1600" b="0"/>
+              <a:t>Same target, same fixture, same model. Only prompt + parser changed.</a:t>
+            </a:r>
+          </a:p>
+        </p:txBody>
+      </p:sp>
+      <p:graphicFrame>
+        <p:nvGraphicFramePr>
+          <p:cNvPr id="4" name="Table 3"/>
+          <p:cNvGraphicFramePr>
+            <a:graphicFrameLocks noGrp="1"/>
+          </p:cNvGraphicFramePr>
+          <p:nvPr/>
+        </p:nvGraphicFramePr>
+        <p:xfrm>
+          <a:off x="731520" y="1828800"/>
+          <a:ext cx="10515600" cy="2926080"/>
+        </p:xfrm>
+        <a:graphic>
+          <a:graphicData uri="http://schemas.openxmlformats.org/drawingml/2006/table">
+            <a:tbl>
+              <a:tblPr firstRow="1" bandRow="1">
+                <a:tableStyleId>{5C22544A-7EE6-4342-B048-85BDC9FD1C3A}</a:tableStyleId>
+              </a:tblPr>
+              <a:tblGrid>
+                <a:gridCol w="2103120"/>
+                <a:gridCol w="2103120"/>
+                <a:gridCol w="2103120"/>
+                <a:gridCol w="2103120"/>
+                <a:gridCol w="2103120"/>
+              </a:tblGrid>
+              <a:tr h="418011">
+                <a:tc>
+                  <a:txBody>
+                    <a:bodyPr/>
+                    <a:lstStyle/>
+                    <a:p>
+                      <a:r>
+                        <a:rPr sz="1600" b="1"/>
+                        <a:t>metric</a:t>
+                      </a:r>
+                    </a:p>
+                  </a:txBody>
+                  <a:tcPr/>
+                </a:tc>
+                <a:tc>
+                  <a:txBody>
+                    <a:bodyPr/>
+                    <a:lstStyle/>
+                    <a:p>
+                      <a:r>
+                        <a:rPr sz="1600" b="1"/>
+                        <a:t>exp1 (gap)</a:t>
+                      </a:r>
+                    </a:p>
+                  </a:txBody>
+                  <a:tcPr/>
+                </a:tc>
+                <a:tc>
+                  <a:txBody>
+                    <a:bodyPr/>
+                    <a:lstStyle/>
+                    <a:p>
+                      <a:r>
+                        <a:rPr sz="1600" b="1"/>
+                        <a:t>exp2 (source)</a:t>
+                      </a:r>
+                    </a:p>
+                  </a:txBody>
+                  <a:tcPr/>
+                </a:tc>
+                <a:tc>
+                  <a:txBody>
+                    <a:bodyPr/>
+                    <a:lstStyle/>
+                    <a:p>
+                      <a:r>
+                        <a:rPr sz="1600" b="1"/>
+                        <a:t>union</a:t>
+                      </a:r>
+                    </a:p>
+                  </a:txBody>
+                  <a:tcPr/>
+                </a:tc>
+                <a:tc>
+                  <a:txBody>
+                    <a:bodyPr/>
+                    <a:lstStyle/>
+                    <a:p>
+                      <a:r>
+                        <a:rPr sz="1600" b="1"/>
+                        <a:t>intersection</a:t>
+                      </a:r>
+                    </a:p>
+                  </a:txBody>
+                  <a:tcPr/>
+                </a:tc>
+              </a:tr>
+              <a:tr h="418011">
+                <a:tc>
+                  <a:txBody>
+                    <a:bodyPr/>
+                    <a:lstStyle/>
+                    <a:p>
+                      <a:r>
+                        <a:rPr sz="1600"/>
+                        <a:t>seeds produced</a:t>
+                      </a:r>
+                    </a:p>
+                  </a:txBody>
+                  <a:tcPr/>
+                </a:tc>
+                <a:tc>
+                  <a:txBody>
+                    <a:bodyPr/>
+                    <a:lstStyle/>
+                    <a:p>
+                      <a:r>
+                        <a:rPr sz="1600"/>
+                        <a:t>20</a:t>
+                      </a:r>
+                    </a:p>
+                  </a:txBody>
+                  <a:tcPr/>
+                </a:tc>
+                <a:tc>
+                  <a:txBody>
+                    <a:bodyPr/>
+                    <a:lstStyle/>
+                    <a:p>
+                      <a:r>
+                        <a:rPr sz="1600"/>
+                        <a:t>30</a:t>
+                      </a:r>
+                    </a:p>
+                  </a:txBody>
+                  <a:tcPr/>
+                </a:tc>
+                <a:tc>
+                  <a:txBody>
+                    <a:bodyPr/>
+                    <a:lstStyle/>
+                    <a:p>
+                      <a:r>
+                        <a:rPr sz="1600"/>
+                        <a:t>—</a:t>
+                      </a:r>
+                    </a:p>
+                  </a:txBody>
+                  <a:tcPr/>
+                </a:tc>
+                <a:tc>
+                  <a:txBody>
+                    <a:bodyPr/>
+                    <a:lstStyle/>
+                    <a:p>
+                      <a:r>
+                        <a:rPr sz="1600"/>
+                        <a:t>—</a:t>
+                      </a:r>
+                    </a:p>
+                  </a:txBody>
+                  <a:tcPr/>
+                </a:tc>
+              </a:tr>
+              <a:tr h="418011">
+                <a:tc>
+                  <a:txBody>
+                    <a:bodyPr/>
+                    <a:lstStyle/>
+                    <a:p>
+                      <a:r>
+                        <a:rPr sz="1600"/>
+                        <a:t>ok samples / total</a:t>
+                      </a:r>
+                    </a:p>
+                  </a:txBody>
+                  <a:tcPr/>
+                </a:tc>
+                <a:tc>
+                  <a:txBody>
+                    <a:bodyPr/>
+                    <a:lstStyle/>
+                    <a:p>
+                      <a:r>
+                        <a:rPr sz="1600"/>
+                        <a:t>2 / 3</a:t>
+                      </a:r>
+                    </a:p>
+                  </a:txBody>
+                  <a:tcPr/>
+                </a:tc>
+                <a:tc>
+                  <a:txBody>
+                    <a:bodyPr/>
+                    <a:lstStyle/>
+                    <a:p>
+                      <a:r>
+                        <a:rPr sz="1600"/>
+                        <a:t>3 / 3</a:t>
+                      </a:r>
+                    </a:p>
+                  </a:txBody>
+                  <a:tcPr/>
+                </a:tc>
+                <a:tc>
+                  <a:txBody>
+                    <a:bodyPr/>
+                    <a:lstStyle/>
+                    <a:p>
+                      <a:r>
+                        <a:rPr sz="1600"/>
+                        <a:t>—</a:t>
+                      </a:r>
+                    </a:p>
+                  </a:txBody>
+                  <a:tcPr/>
+                </a:tc>
+                <a:tc>
+                  <a:txBody>
+                    <a:bodyPr/>
+                    <a:lstStyle/>
+                    <a:p>
+                      <a:r>
+                        <a:rPr sz="1600"/>
+                        <a:t>—</a:t>
+                      </a:r>
+                    </a:p>
+                  </a:txBody>
+                  <a:tcPr/>
+                </a:tc>
+              </a:tr>
+              <a:tr h="418011">
+                <a:tc>
+                  <a:txBody>
+                    <a:bodyPr/>
+                    <a:lstStyle/>
+                    <a:p>
+                      <a:r>
+                        <a:rPr sz="1600"/>
+                        <a:t>edges covered</a:t>
+                      </a:r>
+                    </a:p>
+                  </a:txBody>
+                  <a:tcPr/>
+                </a:tc>
+                <a:tc>
+                  <a:txBody>
+                    <a:bodyPr/>
+                    <a:lstStyle/>
+                    <a:p>
+                      <a:r>
+                        <a:rPr sz="1600"/>
+                        <a:t>1243</a:t>
+                      </a:r>
+                    </a:p>
+                  </a:txBody>
+                  <a:tcPr/>
+                </a:tc>
+                <a:tc>
+                  <a:txBody>
+                    <a:bodyPr/>
+                    <a:lstStyle/>
+                    <a:p>
+                      <a:r>
+                        <a:rPr sz="1600"/>
+                        <a:t>1133</a:t>
+                      </a:r>
+                    </a:p>
+                  </a:txBody>
+                  <a:tcPr/>
+                </a:tc>
+                <a:tc>
+                  <a:txBody>
+                    <a:bodyPr/>
+                    <a:lstStyle/>
+                    <a:p>
+                      <a:r>
+                        <a:rPr sz="1600"/>
+                        <a:t>1308</a:t>
+                      </a:r>
+                    </a:p>
+                  </a:txBody>
+                  <a:tcPr/>
+                </a:tc>
+                <a:tc>
+                  <a:txBody>
+                    <a:bodyPr/>
+                    <a:lstStyle/>
+                    <a:p>
+                      <a:r>
+                        <a:rPr sz="1600"/>
+                        <a:t>1068</a:t>
+                      </a:r>
+                    </a:p>
+                  </a:txBody>
+                  <a:tcPr/>
+                </a:tc>
+              </a:tr>
+              <a:tr h="418011">
+                <a:tc>
+                  <a:txBody>
+                    <a:bodyPr/>
+                    <a:lstStyle/>
+                    <a:p>
+                      <a:r>
+                        <a:rPr sz="1600"/>
+                        <a:t>lines covered</a:t>
+                      </a:r>
+                    </a:p>
+                  </a:txBody>
+                  <a:tcPr/>
+                </a:tc>
+                <a:tc>
+                  <a:txBody>
+                    <a:bodyPr/>
+                    <a:lstStyle/>
+                    <a:p>
+                      <a:r>
+                        <a:rPr sz="1600"/>
+                        <a:t>2530</a:t>
+                      </a:r>
+                    </a:p>
+                  </a:txBody>
+                  <a:tcPr/>
+                </a:tc>
+                <a:tc>
+                  <a:txBody>
+                    <a:bodyPr/>
+                    <a:lstStyle/>
+                    <a:p>
+                      <a:r>
+                        <a:rPr sz="1600"/>
+                        <a:t>2385</a:t>
+                      </a:r>
+                    </a:p>
+                  </a:txBody>
+                  <a:tcPr/>
+                </a:tc>
+                <a:tc>
+                  <a:txBody>
+                    <a:bodyPr/>
+                    <a:lstStyle/>
+                    <a:p>
+                      <a:r>
+                        <a:rPr sz="1600"/>
+                        <a:t>2661</a:t>
+                      </a:r>
+                    </a:p>
+                  </a:txBody>
+                  <a:tcPr/>
+                </a:tc>
+                <a:tc>
+                  <a:txBody>
+                    <a:bodyPr/>
+                    <a:lstStyle/>
+                    <a:p>
+                      <a:r>
+                        <a:rPr sz="1600"/>
+                        <a:t>2254</a:t>
+                      </a:r>
+                    </a:p>
+                  </a:txBody>
+                  <a:tcPr/>
+                </a:tc>
+              </a:tr>
+              <a:tr h="418011">
+                <a:tc>
+                  <a:txBody>
+                    <a:bodyPr/>
+                    <a:lstStyle/>
+                    <a:p>
+                      <a:r>
+                        <a:rPr sz="1600"/>
+                        <a:t>edges ONLY in this cell</a:t>
+                      </a:r>
+                    </a:p>
+                  </a:txBody>
+                  <a:tcPr/>
+                </a:tc>
+                <a:tc>
+                  <a:txBody>
+                    <a:bodyPr/>
+                    <a:lstStyle/>
+                    <a:p>
+                      <a:r>
+                        <a:rPr sz="1600"/>
+                        <a:t>175</a:t>
+                      </a:r>
+                    </a:p>
+                  </a:txBody>
+                  <a:tcPr/>
+                </a:tc>
+                <a:tc>
+                  <a:txBody>
+                    <a:bodyPr/>
+                    <a:lstStyle/>
+                    <a:p>
+                      <a:r>
+                        <a:rPr sz="1600"/>
+                        <a:t>65</a:t>
+                      </a:r>
+                    </a:p>
+                  </a:txBody>
+                  <a:tcPr/>
+                </a:tc>
+                <a:tc>
+                  <a:txBody>
+                    <a:bodyPr/>
+                    <a:lstStyle/>
+                    <a:p>
+                      <a:r>
+                        <a:rPr sz="1600"/>
+                        <a:t>—</a:t>
+                      </a:r>
+                    </a:p>
+                  </a:txBody>
+                  <a:tcPr/>
+                </a:tc>
+                <a:tc>
+                  <a:txBody>
+                    <a:bodyPr/>
+                    <a:lstStyle/>
+                    <a:p>
+                      <a:r>
+                        <a:rPr sz="1600"/>
+                        <a:t>—</a:t>
+                      </a:r>
+                    </a:p>
+                  </a:txBody>
+                  <a:tcPr/>
+                </a:tc>
+              </a:tr>
+              <a:tr h="418014">
+                <a:tc>
+                  <a:txBody>
+                    <a:bodyPr/>
+                    <a:lstStyle/>
+                    <a:p>
+                      <a:r>
+                        <a:rPr sz="1600"/>
+                        <a:t>Jaccard (edges)</a:t>
+                      </a:r>
+                    </a:p>
+                  </a:txBody>
+                  <a:tcPr/>
+                </a:tc>
+                <a:tc>
+                  <a:txBody>
+                    <a:bodyPr/>
+                    <a:lstStyle/>
+                    <a:p>
+                      <a:r>
+                        <a:rPr sz="1600"/>
+                        <a:t>—</a:t>
+                      </a:r>
+                    </a:p>
+                  </a:txBody>
+                  <a:tcPr/>
+                </a:tc>
+                <a:tc>
+                  <a:txBody>
+                    <a:bodyPr/>
+                    <a:lstStyle/>
+                    <a:p>
+                      <a:r>
+                        <a:rPr sz="1600"/>
+                        <a:t>—</a:t>
+                      </a:r>
+                    </a:p>
+                  </a:txBody>
+                  <a:tcPr/>
+                </a:tc>
+                <a:tc>
+                  <a:txBody>
+                    <a:bodyPr/>
+                    <a:lstStyle/>
+                    <a:p>
+                      <a:r>
+                        <a:rPr sz="1600"/>
+                        <a:t>0.817</a:t>
+                      </a:r>
+                    </a:p>
+                  </a:txBody>
+                  <a:tcPr/>
+                </a:tc>
+                <a:tc>
+                  <a:txBody>
+                    <a:bodyPr/>
+                    <a:lstStyle/>
+                    <a:p>
+                      <a:r>
+                        <a:rPr sz="1600"/>
+                        <a:t>—</a:t>
+                      </a:r>
+                    </a:p>
+                  </a:txBody>
+                  <a:tcPr/>
+                </a:tc>
+              </a:tr>
+            </a:tbl>
+          </a:graphicData>
+        </a:graphic>
+      </p:graphicFrame>
+      <p:sp>
+        <p:nvSpPr>
+          <p:cNvPr id="5" name="TextBox 4"/>
+          <p:cNvSpPr txBox="1"/>
+          <p:nvPr/>
+        </p:nvSpPr>
+        <p:spPr>
+          <a:xfrm>
+            <a:off x="548640" y="4937760"/>
+            <a:ext cx="11155680" cy="4846320"/>
+          </a:xfrm>
+          <a:prstGeom prst="rect">
+            <a:avLst/>
+          </a:prstGeom>
+          <a:noFill/>
+        </p:spPr>
+        <p:txBody>
+          <a:bodyPr wrap="square">
+            <a:spAutoFit/>
+          </a:bodyPr>
+          <a:lstStyle/>
+          <a:p>
+            <a:pPr>
+              <a:spcAft>
+                <a:spcPts val="600"/>
+              </a:spcAft>
+            </a:pPr>
+            <a:r>
+              <a:rPr sz="1700"/>
+              <a:t>Coverage per cell roughly tripled.    Loop-abort rate 5/6 → 1/6.</a:t>
+            </a:r>
+          </a:p>
+          <a:p>
+            <a:pPr>
+              <a:spcAft>
+                <a:spcPts val="600"/>
+              </a:spcAft>
+            </a:pPr>
+            <a:r>
+              <a:rPr sz="1700"/>
+              <a:t>Exp1 (gap-targeted) now wins by +110 edges and 175 vs 65 exclusive.</a:t>
+            </a:r>
+          </a:p>
+        </p:txBody>
+      </p:sp>
+    </p:spTree>
+  </p:cSld>
+  <p:clrMapOvr>
+    <a:masterClrMapping/>
+  </p:clrMapOvr>
+</p:sld>
+</file>
+
+<file path=ppt/slides/slide14.xml><?xml version="1.0" encoding="utf-8"?>
+<p:sld xmlns:a="http://schemas.openxmlformats.org/drawingml/2006/main" xmlns:p="http://schemas.openxmlformats.org/presentationml/2006/main" xmlns:r="http://schemas.openxmlformats.org/officeDocument/2006/relationships">
+  <p:cSld>
+    <p:spTree>
+      <p:nvGrpSpPr>
+        <p:cNvPr id="1" name=""/>
+        <p:cNvGrpSpPr/>
+        <p:nvPr/>
+      </p:nvGrpSpPr>
+      <p:grpSpPr/>
+      <p:sp>
+        <p:nvSpPr>
+          <p:cNvPr id="2" name="TextBox 1"/>
+          <p:cNvSpPr txBox="1"/>
+          <p:nvPr/>
+        </p:nvSpPr>
+        <p:spPr>
+          <a:xfrm>
+            <a:off x="457200" y="274320"/>
+            <a:ext cx="11247120" cy="822960"/>
+          </a:xfrm>
+          <a:prstGeom prst="rect">
+            <a:avLst/>
+          </a:prstGeom>
+          <a:noFill/>
+        </p:spPr>
+        <p:txBody>
+          <a:bodyPr wrap="none">
+            <a:spAutoFit/>
+          </a:bodyPr>
+          <a:lstStyle/>
+          <a:p>
+            <a:r>
+              <a:rPr sz="3200" b="1"/>
               <a:t>Bytes vs regex — what the rewrite actually changed</a:t>
             </a:r>
           </a:p>
@@ -3781,7 +5329,7 @@
 </p:sld>
 </file>
 
-<file path=ppt/slides/slide11.xml><?xml version="1.0" encoding="utf-8"?>
+<file path=ppt/slides/slide15.xml><?xml version="1.0" encoding="utf-8"?>
 <p:sld xmlns:a="http://schemas.openxmlformats.org/drawingml/2006/main" xmlns:p="http://schemas.openxmlformats.org/presentationml/2006/main" xmlns:r="http://schemas.openxmlformats.org/officeDocument/2006/relationships">
   <p:cSld>
     <p:spTree>
@@ -4180,7 +5728,7 @@
 </p:sld>
 </file>
 
-<file path=ppt/slides/slide12.xml><?xml version="1.0" encoding="utf-8"?>
+<file path=ppt/slides/slide16.xml><?xml version="1.0" encoding="utf-8"?>
 <p:sld xmlns:a="http://schemas.openxmlformats.org/drawingml/2006/main" xmlns:p="http://schemas.openxmlformats.org/presentationml/2006/main" xmlns:r="http://schemas.openxmlformats.org/officeDocument/2006/relationships">
   <p:cSld>
     <p:spTree>
@@ -4371,7 +5919,7 @@
 </p:sld>
 </file>
 
-<file path=ppt/slides/slide13.xml><?xml version="1.0" encoding="utf-8"?>
+<file path=ppt/slides/slide17.xml><?xml version="1.0" encoding="utf-8"?>
 <p:sld xmlns:a="http://schemas.openxmlformats.org/drawingml/2006/main" xmlns:p="http://schemas.openxmlformats.org/presentationml/2006/main" xmlns:r="http://schemas.openxmlformats.org/officeDocument/2006/relationships">
   <p:cSld>
     <p:spTree>
@@ -4624,7 +6172,7 @@
 </p:sld>
 </file>
 
-<file path=ppt/slides/slide14.xml><?xml version="1.0" encoding="utf-8"?>
+<file path=ppt/slides/slide18.xml><?xml version="1.0" encoding="utf-8"?>
 <p:sld xmlns:a="http://schemas.openxmlformats.org/drawingml/2006/main" xmlns:p="http://schemas.openxmlformats.org/presentationml/2006/main" xmlns:r="http://schemas.openxmlformats.org/officeDocument/2006/relationships">
   <p:cSld>
     <p:spTree>
@@ -4687,22 +6235,100 @@
           <a:p>
             <a:r>
               <a:rPr sz="1600" b="0"/>
-              <a:t>30 seeds of [2 random flag bytes][random ASCII 1-62], seeded random.Random(42)</a:t>
+              <a:t>synthesis/scripts/generate_random_inputs.py --count 30 --seed 42 --input-format regex</a:t>
+            </a:r>
+          </a:p>
+        </p:txBody>
+      </p:sp>
+      <p:sp>
+        <p:nvSpPr>
+          <p:cNvPr id="4" name="TextBox 3"/>
+          <p:cNvSpPr txBox="1"/>
+          <p:nvPr/>
+        </p:nvSpPr>
+        <p:spPr>
+          <a:xfrm>
+            <a:off x="548640" y="1371600"/>
+            <a:ext cx="11155680" cy="1645920"/>
+          </a:xfrm>
+          <a:prstGeom prst="rect">
+            <a:avLst/>
+          </a:prstGeom>
+          <a:noFill/>
+        </p:spPr>
+        <p:txBody>
+          <a:bodyPr wrap="square">
+            <a:spAutoFit/>
+          </a:bodyPr>
+          <a:lstStyle/>
+          <a:p>
+            <a:pPr>
+              <a:spcAft>
+                <a:spcPts val="600"/>
+              </a:spcAft>
+            </a:pPr>
+            <a:r>
+              <a:rPr sz="1400"/>
+              <a:t>No LLM. Per seed: [2 random flag bytes][random ASCII, length 1-62] — deterministic under Random(42).</a:t>
+            </a:r>
+          </a:p>
+          <a:p>
+            <a:pPr>
+              <a:spcAft>
+                <a:spcPts val="600"/>
+              </a:spcAft>
+            </a:pPr>
+            <a:r>
+              <a:rPr sz="1400"/>
+              <a:t>Sample seeds (hex preview, first byte = flag0, second = flag1, rest = ASCII body):</a:t>
+            </a:r>
+          </a:p>
+          <a:p>
+            <a:pPr>
+              <a:spcAft>
+                <a:spcPts val="600"/>
+              </a:spcAft>
+            </a:pPr>
+            <a:r>
+              <a:rPr sz="1400"/>
+              <a:t>   seed_00.bin : 8C 31  4D 62 69 32 42 6F …      "Mbi2Bo…"</a:t>
+            </a:r>
+          </a:p>
+          <a:p>
+            <a:pPr>
+              <a:spcAft>
+                <a:spcPts val="600"/>
+              </a:spcAft>
+            </a:pPr>
+            <a:r>
+              <a:rPr sz="1400"/>
+              <a:t>   seed_01.bin : 41 7E  32 41 50 77 5A 6B …      "2APwZk…"</a:t>
+            </a:r>
+          </a:p>
+          <a:p>
+            <a:pPr>
+              <a:spcAft>
+                <a:spcPts val="600"/>
+              </a:spcAft>
+            </a:pPr>
+            <a:r>
+              <a:rPr sz="1400"/>
+              <a:t>   seed_02.bin : F0 19  74 68 6E 62 57 31 …      "thnbW1…"</a:t>
             </a:r>
           </a:p>
         </p:txBody>
       </p:sp>
       <p:graphicFrame>
         <p:nvGraphicFramePr>
-          <p:cNvPr id="4" name="Table 3"/>
+          <p:cNvPr id="5" name="Table 4"/>
           <p:cNvGraphicFramePr>
             <a:graphicFrameLocks noGrp="1"/>
           </p:cNvGraphicFramePr>
           <p:nvPr/>
         </p:nvGraphicFramePr>
         <p:xfrm>
-          <a:off x="731520" y="1828800"/>
-          <a:ext cx="10515600" cy="2011680"/>
+          <a:off x="731520" y="3200400"/>
+          <a:ext cx="10515600" cy="1828800"/>
         </p:xfrm>
         <a:graphic>
           <a:graphicData uri="http://schemas.openxmlformats.org/drawingml/2006/table">
@@ -4716,14 +6342,14 @@
                 <a:gridCol w="2628900"/>
                 <a:gridCol w="2628900"/>
               </a:tblGrid>
-              <a:tr h="502920">
-                <a:tc>
-                  <a:txBody>
-                    <a:bodyPr/>
-                    <a:lstStyle/>
-                    <a:p>
-                      <a:r>
-                        <a:rPr sz="1800" b="1"/>
+              <a:tr h="457200">
+                <a:tc>
+                  <a:txBody>
+                    <a:bodyPr/>
+                    <a:lstStyle/>
+                    <a:p>
+                      <a:r>
+                        <a:rPr sz="1700" b="1"/>
                         <a:t>cell</a:t>
                       </a:r>
                     </a:p>
@@ -4736,7 +6362,7 @@
                     <a:lstStyle/>
                     <a:p>
                       <a:r>
-                        <a:rPr sz="1800" b="1"/>
+                        <a:rPr sz="1700" b="1"/>
                         <a:t>seeds</a:t>
                       </a:r>
                     </a:p>
@@ -4749,7 +6375,7 @@
                     <a:lstStyle/>
                     <a:p>
                       <a:r>
-                        <a:rPr sz="1800" b="1"/>
+                        <a:rPr sz="1700" b="1"/>
                         <a:t>edges</a:t>
                       </a:r>
                     </a:p>
@@ -4762,7 +6388,7 @@
                     <a:lstStyle/>
                     <a:p>
                       <a:r>
-                        <a:rPr sz="1800" b="1"/>
+                        <a:rPr sz="1700" b="1"/>
                         <a:t>Δ vs random</a:t>
                       </a:r>
                     </a:p>
@@ -4770,14 +6396,14 @@
                   <a:tcPr/>
                 </a:tc>
               </a:tr>
-              <a:tr h="502920">
-                <a:tc>
-                  <a:txBody>
-                    <a:bodyPr/>
-                    <a:lstStyle/>
-                    <a:p>
-                      <a:r>
-                        <a:rPr sz="1800"/>
+              <a:tr h="457200">
+                <a:tc>
+                  <a:txBody>
+                    <a:bodyPr/>
+                    <a:lstStyle/>
+                    <a:p>
+                      <a:r>
+                        <a:rPr sz="1700"/>
                         <a:t>exp1 (gap-targeted)</a:t>
                       </a:r>
                     </a:p>
@@ -4790,7 +6416,7 @@
                     <a:lstStyle/>
                     <a:p>
                       <a:r>
-                        <a:rPr sz="1800"/>
+                        <a:rPr sz="1700"/>
                         <a:t>20</a:t>
                       </a:r>
                     </a:p>
@@ -4803,7 +6429,7 @@
                     <a:lstStyle/>
                     <a:p>
                       <a:r>
-                        <a:rPr sz="1800"/>
+                        <a:rPr sz="1700"/>
                         <a:t>1243</a:t>
                       </a:r>
                     </a:p>
@@ -4816,7 +6442,7 @@
                     <a:lstStyle/>
                     <a:p>
                       <a:r>
-                        <a:rPr sz="1800"/>
+                        <a:rPr sz="1700"/>
                         <a:t>+263  (+27%)</a:t>
                       </a:r>
                     </a:p>
@@ -4824,14 +6450,14 @@
                   <a:tcPr/>
                 </a:tc>
               </a:tr>
-              <a:tr h="502920">
-                <a:tc>
-                  <a:txBody>
-                    <a:bodyPr/>
-                    <a:lstStyle/>
-                    <a:p>
-                      <a:r>
-                        <a:rPr sz="1800"/>
+              <a:tr h="457200">
+                <a:tc>
+                  <a:txBody>
+                    <a:bodyPr/>
+                    <a:lstStyle/>
+                    <a:p>
+                      <a:r>
+                        <a:rPr sz="1700"/>
                         <a:t>exp2 (source-only)</a:t>
                       </a:r>
                     </a:p>
@@ -4844,7 +6470,7 @@
                     <a:lstStyle/>
                     <a:p>
                       <a:r>
-                        <a:rPr sz="1800"/>
+                        <a:rPr sz="1700"/>
                         <a:t>30</a:t>
                       </a:r>
                     </a:p>
@@ -4857,7 +6483,7 @@
                     <a:lstStyle/>
                     <a:p>
                       <a:r>
-                        <a:rPr sz="1800"/>
+                        <a:rPr sz="1700"/>
                         <a:t>1133</a:t>
                       </a:r>
                     </a:p>
@@ -4870,7 +6496,7 @@
                     <a:lstStyle/>
                     <a:p>
                       <a:r>
-                        <a:rPr sz="1800"/>
+                        <a:rPr sz="1700"/>
                         <a:t>+153  (+16%)</a:t>
                       </a:r>
                     </a:p>
@@ -4878,14 +6504,14 @@
                   <a:tcPr/>
                 </a:tc>
               </a:tr>
-              <a:tr h="502920">
-                <a:tc>
-                  <a:txBody>
-                    <a:bodyPr/>
-                    <a:lstStyle/>
-                    <a:p>
-                      <a:r>
-                        <a:rPr sz="1800"/>
+              <a:tr h="457200">
+                <a:tc>
+                  <a:txBody>
+                    <a:bodyPr/>
+                    <a:lstStyle/>
+                    <a:p>
+                      <a:r>
+                        <a:rPr sz="1700"/>
                         <a:t>random baseline</a:t>
                       </a:r>
                     </a:p>
@@ -4898,7 +6524,7 @@
                     <a:lstStyle/>
                     <a:p>
                       <a:r>
-                        <a:rPr sz="1800"/>
+                        <a:rPr sz="1700"/>
                         <a:t>30</a:t>
                       </a:r>
                     </a:p>
@@ -4911,7 +6537,7 @@
                     <a:lstStyle/>
                     <a:p>
                       <a:r>
-                        <a:rPr sz="1800"/>
+                        <a:rPr sz="1700"/>
                         <a:t>980</a:t>
                       </a:r>
                     </a:p>
@@ -4924,7 +6550,7 @@
                     <a:lstStyle/>
                     <a:p>
                       <a:r>
-                        <a:rPr sz="1800"/>
+                        <a:rPr sz="1700"/>
                         <a:t>—</a:t>
                       </a:r>
                     </a:p>
@@ -4938,13 +6564,13 @@
       </p:graphicFrame>
       <p:sp>
         <p:nvSpPr>
-          <p:cNvPr id="5" name="TextBox 4"/>
+          <p:cNvPr id="6" name="TextBox 5"/>
           <p:cNvSpPr txBox="1"/>
           <p:nvPr/>
         </p:nvSpPr>
         <p:spPr>
           <a:xfrm>
-            <a:off x="548640" y="4206240"/>
+            <a:off x="548640" y="5303520"/>
             <a:ext cx="11155680" cy="4846320"/>
           </a:xfrm>
           <a:prstGeom prst="rect">
@@ -4964,52 +6590,30 @@
               </a:spcAft>
             </a:pPr>
             <a:r>
-              <a:rPr sz="1700"/>
-              <a:t>Both LLM cells clear the floor meaningfully — the "+110 edges" claim</a:t>
-            </a:r>
-          </a:p>
-          <a:p>
-            <a:pPr>
-              <a:spcAft>
-                <a:spcPts val="600"/>
-              </a:spcAft>
-            </a:pPr>
-            <a:r>
-              <a:rPr sz="1700"/>
-              <a:t>is not a rounding artefact on top of noise.</a:t>
-            </a:r>
-          </a:p>
-          <a:p>
-            <a:pPr>
-              <a:spcAft>
-                <a:spcPts val="600"/>
-              </a:spcAft>
-            </a:pPr>
-            <a:r>
-              <a:rPr sz="1700"/>
-              <a:t/>
-            </a:r>
-          </a:p>
-          <a:p>
-            <a:pPr>
-              <a:spcAft>
-                <a:spcPts val="600"/>
-              </a:spcAft>
-            </a:pPr>
-            <a:r>
-              <a:rPr sz="1700"/>
-              <a:t>But: exp1's +110 lead over exp2 is only ≈42% of exp1's +263 lead over random.</a:t>
-            </a:r>
-          </a:p>
-          <a:p>
-            <a:pPr>
-              <a:spcAft>
-                <a:spcPts val="600"/>
-              </a:spcAft>
-            </a:pPr>
-            <a:r>
-              <a:rPr sz="1700"/>
-              <a:t>Most of the above-random signal is reachable by exp2's recipe already.</a:t>
+              <a:rPr sz="1500"/>
+              <a:t>Both LLM cells clear the floor meaningfully — the "+110 edges" claim is not noise.</a:t>
+            </a:r>
+          </a:p>
+          <a:p>
+            <a:pPr>
+              <a:spcAft>
+                <a:spcPts val="600"/>
+              </a:spcAft>
+            </a:pPr>
+            <a:r>
+              <a:rPr sz="1500"/>
+              <a:t>But: exp1's +110 over exp2 is only ≈42% of its +263 over random — most of the</a:t>
+            </a:r>
+          </a:p>
+          <a:p>
+            <a:pPr>
+              <a:spcAft>
+                <a:spcPts val="600"/>
+              </a:spcAft>
+            </a:pPr>
+            <a:r>
+              <a:rPr sz="1500"/>
+              <a:t>above-random signal is reachable by exp2's recipe already.</a:t>
             </a:r>
           </a:p>
         </p:txBody>
@@ -5022,7 +6626,7 @@
 </p:sld>
 </file>
 
-<file path=ppt/slides/slide15.xml><?xml version="1.0" encoding="utf-8"?>
+<file path=ppt/slides/slide19.xml><?xml version="1.0" encoding="utf-8"?>
 <p:sld xmlns:a="http://schemas.openxmlformats.org/drawingml/2006/main" xmlns:p="http://schemas.openxmlformats.org/presentationml/2006/main" xmlns:r="http://schemas.openxmlformats.org/officeDocument/2006/relationships">
   <p:cSld>
     <p:spTree>
@@ -5098,8 +6702,8 @@
         </p:nvSpPr>
         <p:spPr>
           <a:xfrm>
-            <a:off x="548640" y="1371600"/>
-            <a:ext cx="11155680" cy="1280160"/>
+            <a:off x="548640" y="1280160"/>
+            <a:ext cx="11155680" cy="2651760"/>
           </a:xfrm>
           <a:prstGeom prst="rect">
             <a:avLst/>
@@ -5118,41 +6722,96 @@
               </a:spcAft>
             </a:pPr>
             <a:r>
-              <a:rPr sz="1500"/>
-              <a:t>Set A (gap list restricted here):   re2/parse.cc, re2/regexp.cc,</a:t>
-            </a:r>
-          </a:p>
-          <a:p>
-            <a:pPr>
-              <a:spcAft>
-                <a:spcPts val="600"/>
-              </a:spcAft>
-            </a:pPr>
-            <a:r>
-              <a:rPr sz="1500"/>
-              <a:t>                                     re2/simplify.cc, re2/tostring.cc</a:t>
-            </a:r>
-          </a:p>
-          <a:p>
-            <a:pPr>
-              <a:spcAft>
-                <a:spcPts val="600"/>
-              </a:spcAft>
-            </a:pPr>
-            <a:r>
-              <a:rPr sz="1500"/>
-              <a:t>Set B (held out, coverage measured): re2/{compile,prog,dfa,nfa,onepass,</a:t>
-            </a:r>
-          </a:p>
-          <a:p>
-            <a:pPr>
-              <a:spcAft>
-                <a:spcPts val="600"/>
-              </a:spcAft>
-            </a:pPr>
-            <a:r>
-              <a:rPr sz="1500"/>
-              <a:t>                                     bitstate,re2}.cc + util/{rune,strutil}.cc</a:t>
+              <a:rPr sz="1400"/>
+              <a:t>Set A (gap list restricted here):   re2/parse.cc, re2/regexp.cc, re2/simplify.cc, re2/tostring.cc</a:t>
+            </a:r>
+          </a:p>
+          <a:p>
+            <a:pPr>
+              <a:spcAft>
+                <a:spcPts val="600"/>
+              </a:spcAft>
+            </a:pPr>
+            <a:r>
+              <a:rPr sz="1400"/>
+              <a:t>Set B (held out; coverage measured): re2/{compile,prog,dfa,nfa,onepass,bitstate,re2}.cc +</a:t>
+            </a:r>
+          </a:p>
+          <a:p>
+            <a:pPr>
+              <a:spcAft>
+                <a:spcPts val="600"/>
+              </a:spcAft>
+            </a:pPr>
+            <a:r>
+              <a:rPr sz="1400"/>
+              <a:t>                                      util/{rune,strutil}.cc</a:t>
+            </a:r>
+          </a:p>
+          <a:p>
+            <a:pPr>
+              <a:spcAft>
+                <a:spcPts val="600"/>
+              </a:spcAft>
+            </a:pPr>
+            <a:r>
+              <a:rPr sz="1400"/>
+              <a:t/>
+            </a:r>
+          </a:p>
+          <a:p>
+            <a:pPr>
+              <a:spcAft>
+                <a:spcPts val="600"/>
+              </a:spcAft>
+            </a:pPr>
+            <a:r>
+              <a:rPr sz="1400"/>
+              <a:t>How the exp1_heldout cell is synthesized (prompt-level diff, everything else unchanged):</a:t>
+            </a:r>
+          </a:p>
+          <a:p>
+            <a:pPr>
+              <a:spcAft>
+                <a:spcPts val="600"/>
+              </a:spcAft>
+            </a:pPr>
+            <a:r>
+              <a:rPr sz="1400"/>
+              <a:t>  compute_gaps.py  --gap-source-roots re2/parse.cc re2/regexp.cc re2/simplify.cc re2/tostring.cc</a:t>
+            </a:r>
+          </a:p>
+          <a:p>
+            <a:pPr>
+              <a:spcAft>
+                <a:spcPts val="600"/>
+              </a:spcAft>
+            </a:pPr>
+            <a:r>
+              <a:rPr sz="1400"/>
+              <a:t>       → coverage_gaps.json contains ONLY gaps inside set A</a:t>
+            </a:r>
+          </a:p>
+          <a:p>
+            <a:pPr>
+              <a:spcAft>
+                <a:spcPts val="600"/>
+              </a:spcAft>
+            </a:pPr>
+            <a:r>
+              <a:rPr sz="1400"/>
+              <a:t>       → the "=== UNCOVERED BRANCHES ===" block the LLM sees lists set-A files only</a:t>
+            </a:r>
+          </a:p>
+          <a:p>
+            <a:pPr>
+              <a:spcAft>
+                <a:spcPts val="600"/>
+              </a:spcAft>
+            </a:pPr>
+            <a:r>
+              <a:rPr sz="1400"/>
+              <a:t>  measure_coverage.py --source-roots &lt;set-B dirs&gt;   → edges counted only on held-out files</a:t>
             </a:r>
           </a:p>
         </p:txBody>
@@ -5166,8 +6825,8 @@
           <p:nvPr/>
         </p:nvGraphicFramePr>
         <p:xfrm>
-          <a:off x="731520" y="2926080"/>
-          <a:ext cx="10515600" cy="1920240"/>
+          <a:off x="731520" y="4023360"/>
+          <a:ext cx="10515600" cy="1828800"/>
         </p:xfrm>
         <a:graphic>
           <a:graphicData uri="http://schemas.openxmlformats.org/drawingml/2006/table">
@@ -5181,14 +6840,14 @@
                 <a:gridCol w="2628900"/>
                 <a:gridCol w="2628900"/>
               </a:tblGrid>
-              <a:tr h="384048">
-                <a:tc>
-                  <a:txBody>
-                    <a:bodyPr/>
-                    <a:lstStyle/>
-                    <a:p>
-                      <a:r>
-                        <a:rPr sz="1700" b="1"/>
+              <a:tr h="365760">
+                <a:tc>
+                  <a:txBody>
+                    <a:bodyPr/>
+                    <a:lstStyle/>
+                    <a:p>
+                      <a:r>
+                        <a:rPr sz="1600" b="1"/>
                         <a:t>cell</a:t>
                       </a:r>
                     </a:p>
@@ -5201,7 +6860,7 @@
                     <a:lstStyle/>
                     <a:p>
                       <a:r>
-                        <a:rPr sz="1700" b="1"/>
+                        <a:rPr sz="1600" b="1"/>
                         <a:t>seeds</a:t>
                       </a:r>
                     </a:p>
@@ -5214,7 +6873,7 @@
                     <a:lstStyle/>
                     <a:p>
                       <a:r>
-                        <a:rPr sz="1700" b="1"/>
+                        <a:rPr sz="1600" b="1"/>
                         <a:t>B-edges</a:t>
                       </a:r>
                     </a:p>
@@ -5227,7 +6886,7 @@
                     <a:lstStyle/>
                     <a:p>
                       <a:r>
-                        <a:rPr sz="1700" b="1"/>
+                        <a:rPr sz="1600" b="1"/>
                         <a:t>Δ vs exp2 on B</a:t>
                       </a:r>
                     </a:p>
@@ -5235,14 +6894,14 @@
                   <a:tcPr/>
                 </a:tc>
               </a:tr>
-              <a:tr h="384048">
-                <a:tc>
-                  <a:txBody>
-                    <a:bodyPr/>
-                    <a:lstStyle/>
-                    <a:p>
-                      <a:r>
-                        <a:rPr sz="1700"/>
+              <a:tr h="365760">
+                <a:tc>
+                  <a:txBody>
+                    <a:bodyPr/>
+                    <a:lstStyle/>
+                    <a:p>
+                      <a:r>
+                        <a:rPr sz="1600"/>
                         <a:t>exp1_full</a:t>
                       </a:r>
                     </a:p>
@@ -5255,7 +6914,7 @@
                     <a:lstStyle/>
                     <a:p>
                       <a:r>
-                        <a:rPr sz="1700"/>
+                        <a:rPr sz="1600"/>
                         <a:t>20</a:t>
                       </a:r>
                     </a:p>
@@ -5268,7 +6927,7 @@
                     <a:lstStyle/>
                     <a:p>
                       <a:r>
-                        <a:rPr sz="1700"/>
+                        <a:rPr sz="1600"/>
                         <a:t>599</a:t>
                       </a:r>
                     </a:p>
@@ -5281,7 +6940,7 @@
                     <a:lstStyle/>
                     <a:p>
                       <a:r>
-                        <a:rPr sz="1700"/>
+                        <a:rPr sz="1600"/>
                         <a:t>+3</a:t>
                       </a:r>
                     </a:p>
@@ -5289,14 +6948,14 @@
                   <a:tcPr/>
                 </a:tc>
               </a:tr>
-              <a:tr h="384048">
-                <a:tc>
-                  <a:txBody>
-                    <a:bodyPr/>
-                    <a:lstStyle/>
-                    <a:p>
-                      <a:r>
-                        <a:rPr sz="1700"/>
+              <a:tr h="365760">
+                <a:tc>
+                  <a:txBody>
+                    <a:bodyPr/>
+                    <a:lstStyle/>
+                    <a:p>
+                      <a:r>
+                        <a:rPr sz="1600"/>
                         <a:t>exp2_source</a:t>
                       </a:r>
                     </a:p>
@@ -5309,7 +6968,7 @@
                     <a:lstStyle/>
                     <a:p>
                       <a:r>
-                        <a:rPr sz="1700"/>
+                        <a:rPr sz="1600"/>
                         <a:t>30</a:t>
                       </a:r>
                     </a:p>
@@ -5322,7 +6981,7 @@
                     <a:lstStyle/>
                     <a:p>
                       <a:r>
-                        <a:rPr sz="1700"/>
+                        <a:rPr sz="1600"/>
                         <a:t>596</a:t>
                       </a:r>
                     </a:p>
@@ -5335,7 +6994,7 @@
                     <a:lstStyle/>
                     <a:p>
                       <a:r>
-                        <a:rPr sz="1700"/>
+                        <a:rPr sz="1600"/>
                         <a:t>0</a:t>
                       </a:r>
                     </a:p>
@@ -5343,14 +7002,14 @@
                   <a:tcPr/>
                 </a:tc>
               </a:tr>
-              <a:tr h="384048">
-                <a:tc>
-                  <a:txBody>
-                    <a:bodyPr/>
-                    <a:lstStyle/>
-                    <a:p>
-                      <a:r>
-                        <a:rPr sz="1700"/>
+              <a:tr h="365760">
+                <a:tc>
+                  <a:txBody>
+                    <a:bodyPr/>
+                    <a:lstStyle/>
+                    <a:p>
+                      <a:r>
+                        <a:rPr sz="1600"/>
                         <a:t>exp1_heldout</a:t>
                       </a:r>
                     </a:p>
@@ -5363,7 +7022,7 @@
                     <a:lstStyle/>
                     <a:p>
                       <a:r>
-                        <a:rPr sz="1700"/>
+                        <a:rPr sz="1600"/>
                         <a:t>30</a:t>
                       </a:r>
                     </a:p>
@@ -5376,7 +7035,7 @@
                     <a:lstStyle/>
                     <a:p>
                       <a:r>
-                        <a:rPr sz="1700"/>
+                        <a:rPr sz="1600"/>
                         <a:t>581</a:t>
                       </a:r>
                     </a:p>
@@ -5389,7 +7048,7 @@
                     <a:lstStyle/>
                     <a:p>
                       <a:r>
-                        <a:rPr sz="1700"/>
+                        <a:rPr sz="1600"/>
                         <a:t>−15</a:t>
                       </a:r>
                     </a:p>
@@ -5397,14 +7056,14 @@
                   <a:tcPr/>
                 </a:tc>
               </a:tr>
-              <a:tr h="384048">
-                <a:tc>
-                  <a:txBody>
-                    <a:bodyPr/>
-                    <a:lstStyle/>
-                    <a:p>
-                      <a:r>
-                        <a:rPr sz="1700"/>
+              <a:tr h="365760">
+                <a:tc>
+                  <a:txBody>
+                    <a:bodyPr/>
+                    <a:lstStyle/>
+                    <a:p>
+                      <a:r>
+                        <a:rPr sz="1600"/>
                         <a:t>random baseline</a:t>
                       </a:r>
                     </a:p>
@@ -5417,7 +7076,7 @@
                     <a:lstStyle/>
                     <a:p>
                       <a:r>
-                        <a:rPr sz="1700"/>
+                        <a:rPr sz="1600"/>
                         <a:t>30</a:t>
                       </a:r>
                     </a:p>
@@ -5430,7 +7089,7 @@
                     <a:lstStyle/>
                     <a:p>
                       <a:r>
-                        <a:rPr sz="1700"/>
+                        <a:rPr sz="1600"/>
                         <a:t>557</a:t>
                       </a:r>
                     </a:p>
@@ -5443,7 +7102,7 @@
                     <a:lstStyle/>
                     <a:p>
                       <a:r>
-                        <a:rPr sz="1700"/>
+                        <a:rPr sz="1600"/>
                         <a:t>−39</a:t>
                       </a:r>
                     </a:p>
@@ -5463,7 +7122,7 @@
         </p:nvSpPr>
         <p:spPr>
           <a:xfrm>
-            <a:off x="548640" y="5120640"/>
+            <a:off x="548640" y="5943600"/>
             <a:ext cx="11155680" cy="4846320"/>
           </a:xfrm>
           <a:prstGeom prst="rect">
@@ -5483,19 +7142,19 @@
               </a:spcAft>
             </a:pPr>
             <a:r>
-              <a:rPr sz="1700"/>
-              <a:t>+110 in-distribution  →  +3 on held-out files  →  −15 when exp1's gaps</a:t>
-            </a:r>
-          </a:p>
-          <a:p>
-            <a:pPr>
-              <a:spcAft>
-                <a:spcPts val="600"/>
-              </a:spcAft>
-            </a:pPr>
-            <a:r>
-              <a:rPr sz="1700"/>
-              <a:t>are restricted to a disjoint file set. exp2's recipe transfers; exp1's does not.</a:t>
+              <a:rPr sz="1400"/>
+              <a:t>+110 in-distribution  →  +3 on held-out files  →  −15 when the gap list is restricted</a:t>
+            </a:r>
+          </a:p>
+          <a:p>
+            <a:pPr>
+              <a:spcAft>
+                <a:spcPts val="600"/>
+              </a:spcAft>
+            </a:pPr>
+            <a:r>
+              <a:rPr sz="1400"/>
+              <a:t>to a disjoint file set.  exp2's recipe transfers; exp1's does not.</a:t>
             </a:r>
           </a:p>
         </p:txBody>
@@ -5508,7 +7167,1134 @@
 </p:sld>
 </file>
 
-<file path=ppt/slides/slide16.xml><?xml version="1.0" encoding="utf-8"?>
+<file path=ppt/slides/slide2.xml><?xml version="1.0" encoding="utf-8"?>
+<p:sld xmlns:a="http://schemas.openxmlformats.org/drawingml/2006/main" xmlns:p="http://schemas.openxmlformats.org/presentationml/2006/main" xmlns:r="http://schemas.openxmlformats.org/officeDocument/2006/relationships">
+  <p:cSld>
+    <p:spTree>
+      <p:nvGrpSpPr>
+        <p:cNvPr id="1" name=""/>
+        <p:cNvGrpSpPr/>
+        <p:nvPr/>
+      </p:nvGrpSpPr>
+      <p:grpSpPr/>
+      <p:sp>
+        <p:nvSpPr>
+          <p:cNvPr id="2" name="TextBox 1"/>
+          <p:cNvSpPr txBox="1"/>
+          <p:nvPr/>
+        </p:nvSpPr>
+        <p:spPr>
+          <a:xfrm>
+            <a:off x="457200" y="274320"/>
+            <a:ext cx="11247120" cy="822960"/>
+          </a:xfrm>
+          <a:prstGeom prst="rect">
+            <a:avLst/>
+          </a:prstGeom>
+          <a:noFill/>
+        </p:spPr>
+        <p:txBody>
+          <a:bodyPr wrap="none">
+            <a:spAutoFit/>
+          </a:bodyPr>
+          <a:lstStyle/>
+          <a:p>
+            <a:r>
+              <a:rPr sz="3200" b="1"/>
+              <a:t>The research question</a:t>
+            </a:r>
+          </a:p>
+        </p:txBody>
+      </p:sp>
+      <p:sp>
+        <p:nvSpPr>
+          <p:cNvPr id="3" name="TextBox 2"/>
+          <p:cNvSpPr txBox="1"/>
+          <p:nvPr/>
+        </p:nvSpPr>
+        <p:spPr>
+          <a:xfrm>
+            <a:off x="457200" y="1051560"/>
+            <a:ext cx="11247120" cy="457200"/>
+          </a:xfrm>
+          <a:prstGeom prst="rect">
+            <a:avLst/>
+          </a:prstGeom>
+          <a:noFill/>
+        </p:spPr>
+        <p:txBody>
+          <a:bodyPr wrap="none">
+            <a:spAutoFit/>
+          </a:bodyPr>
+          <a:lstStyle/>
+          <a:p>
+            <a:r>
+              <a:rPr sz="1600" b="0"/>
+              <a:t>Given a stable pipeline, does gap-targeted synthesis beat source-only?</a:t>
+            </a:r>
+          </a:p>
+        </p:txBody>
+      </p:sp>
+      <p:sp>
+        <p:nvSpPr>
+          <p:cNvPr id="4" name="TextBox 3"/>
+          <p:cNvSpPr txBox="1"/>
+          <p:nvPr/>
+        </p:nvSpPr>
+        <p:spPr>
+          <a:xfrm>
+            <a:off x="548640" y="1645920"/>
+            <a:ext cx="11155680" cy="4846320"/>
+          </a:xfrm>
+          <a:prstGeom prst="rect">
+            <a:avLst/>
+          </a:prstGeom>
+          <a:noFill/>
+        </p:spPr>
+        <p:txBody>
+          <a:bodyPr wrap="square">
+            <a:spAutoFit/>
+          </a:bodyPr>
+          <a:lstStyle/>
+          <a:p>
+            <a:pPr>
+              <a:spcAft>
+                <a:spcPts val="600"/>
+              </a:spcAft>
+            </a:pPr>
+            <a:r>
+              <a:rPr sz="1800"/>
+              <a:t>Exp1  (gap-targeted):   prompt = harness + coverage gaps + a few upstream tests</a:t>
+            </a:r>
+          </a:p>
+          <a:p>
+            <a:pPr>
+              <a:spcAft>
+                <a:spcPts val="600"/>
+              </a:spcAft>
+            </a:pPr>
+            <a:r>
+              <a:rPr sz="1800"/>
+              <a:t>Exp2  (source-only):    prompt = harness + library source code, no tests, no gaps</a:t>
+            </a:r>
+          </a:p>
+          <a:p>
+            <a:pPr>
+              <a:spcAft>
+                <a:spcPts val="600"/>
+              </a:spcAft>
+            </a:pPr>
+            <a:r>
+              <a:rPr sz="1800"/>
+              <a:t/>
+            </a:r>
+          </a:p>
+          <a:p>
+            <a:pPr>
+              <a:spcAft>
+                <a:spcPts val="600"/>
+              </a:spcAft>
+            </a:pPr>
+            <a:r>
+              <a:rPr sz="1800"/>
+              <a:t>Shared: 3-test RE2 fixture (Regexp.BigRef, NamedCaptures, CaptureNames),</a:t>
+            </a:r>
+          </a:p>
+          <a:p>
+            <a:pPr>
+              <a:spcAft>
+                <a:spcPts val="600"/>
+              </a:spcAft>
+            </a:pPr>
+            <a:r>
+              <a:rPr sz="1800"/>
+              <a:t>llama-3.1-8b-instruct, 3 samples per cell, T=0.7, top_p=0.95, identical context otherwise.</a:t>
+            </a:r>
+          </a:p>
+          <a:p>
+            <a:pPr>
+              <a:spcAft>
+                <a:spcPts val="600"/>
+              </a:spcAft>
+            </a:pPr>
+            <a:r>
+              <a:rPr sz="1800"/>
+              <a:t/>
+            </a:r>
+          </a:p>
+          <a:p>
+            <a:pPr>
+              <a:spcAft>
+                <a:spcPts val="600"/>
+              </a:spcAft>
+            </a:pPr>
+            <a:r>
+              <a:rPr sz="1800"/>
+              <a:t>Evaluation: raw seed-corpus edge/line coverage on a standalone seed_replay binary</a:t>
+            </a:r>
+          </a:p>
+          <a:p>
+            <a:pPr>
+              <a:spcAft>
+                <a:spcPts val="600"/>
+              </a:spcAft>
+            </a:pPr>
+            <a:r>
+              <a:rPr sz="1800"/>
+              <a:t>(same LLVMFuzzerTestOneInput as the libFuzzer target, but without injected main()).</a:t>
+            </a:r>
+          </a:p>
+          <a:p>
+            <a:pPr>
+              <a:spcAft>
+                <a:spcPts val="600"/>
+              </a:spcAft>
+            </a:pPr>
+            <a:r>
+              <a:rPr sz="1800"/>
+              <a:t/>
+            </a:r>
+          </a:p>
+          <a:p>
+            <a:pPr>
+              <a:spcAft>
+                <a:spcPts val="600"/>
+              </a:spcAft>
+            </a:pPr>
+            <a:r>
+              <a:rPr sz="1800"/>
+              <a:t>This deck is about seed-corpus quality, not 24h libFuzzer-campaign coverage.</a:t>
+            </a:r>
+          </a:p>
+          <a:p>
+            <a:pPr>
+              <a:spcAft>
+                <a:spcPts val="600"/>
+              </a:spcAft>
+            </a:pPr>
+            <a:r>
+              <a:rPr sz="1800"/>
+              <a:t>That number needs cluster time we don't yet have.</a:t>
+            </a:r>
+          </a:p>
+        </p:txBody>
+      </p:sp>
+    </p:spTree>
+  </p:cSld>
+  <p:clrMapOvr>
+    <a:masterClrMapping/>
+  </p:clrMapOvr>
+</p:sld>
+</file>
+
+<file path=ppt/slides/slide20.xml><?xml version="1.0" encoding="utf-8"?>
+<p:sld xmlns:a="http://schemas.openxmlformats.org/drawingml/2006/main" xmlns:p="http://schemas.openxmlformats.org/presentationml/2006/main" xmlns:r="http://schemas.openxmlformats.org/officeDocument/2006/relationships">
+  <p:cSld>
+    <p:spTree>
+      <p:nvGrpSpPr>
+        <p:cNvPr id="1" name=""/>
+        <p:cNvGrpSpPr/>
+        <p:nvPr/>
+      </p:nvGrpSpPr>
+      <p:grpSpPr/>
+      <p:sp>
+        <p:nvSpPr>
+          <p:cNvPr id="2" name="TextBox 1"/>
+          <p:cNvSpPr txBox="1"/>
+          <p:nvPr/>
+        </p:nvSpPr>
+        <p:spPr>
+          <a:xfrm>
+            <a:off x="457200" y="274320"/>
+            <a:ext cx="11247120" cy="822960"/>
+          </a:xfrm>
+          <a:prstGeom prst="rect">
+            <a:avLst/>
+          </a:prstGeom>
+          <a:noFill/>
+        </p:spPr>
+        <p:txBody>
+          <a:bodyPr wrap="none">
+            <a:spAutoFit/>
+          </a:bodyPr>
+          <a:lstStyle/>
+          <a:p>
+            <a:r>
+              <a:rPr sz="3200" b="1"/>
+              <a:t>Experiment B — prompt matrix (what each cell actually shows the model)</a:t>
+            </a:r>
+          </a:p>
+        </p:txBody>
+      </p:sp>
+      <p:sp>
+        <p:nvSpPr>
+          <p:cNvPr id="3" name="TextBox 2"/>
+          <p:cNvSpPr txBox="1"/>
+          <p:nvPr/>
+        </p:nvSpPr>
+        <p:spPr>
+          <a:xfrm>
+            <a:off x="457200" y="1051560"/>
+            <a:ext cx="11247120" cy="457200"/>
+          </a:xfrm>
+          <a:prstGeom prst="rect">
+            <a:avLst/>
+          </a:prstGeom>
+          <a:noFill/>
+        </p:spPr>
+        <p:txBody>
+          <a:bodyPr wrap="none">
+            <a:spAutoFit/>
+          </a:bodyPr>
+          <a:lstStyle/>
+          <a:p>
+            <a:r>
+              <a:rPr sz="1600" b="0"/>
+              <a:t>Template: synthesis/prompts/ablation_synthesis_regex.j2  (Jinja toggles: include_tests, include_gaps, include_source)</a:t>
+            </a:r>
+          </a:p>
+        </p:txBody>
+      </p:sp>
+      <p:graphicFrame>
+        <p:nvGraphicFramePr>
+          <p:cNvPr id="4" name="Table 3"/>
+          <p:cNvGraphicFramePr>
+            <a:graphicFrameLocks noGrp="1"/>
+          </p:cNvGraphicFramePr>
+          <p:nvPr/>
+        </p:nvGraphicFramePr>
+        <p:xfrm>
+          <a:off x="731520" y="1737360"/>
+          <a:ext cx="10515600" cy="3657600"/>
+        </p:xfrm>
+        <a:graphic>
+          <a:graphicData uri="http://schemas.openxmlformats.org/drawingml/2006/table">
+            <a:tbl>
+              <a:tblPr firstRow="1" bandRow="1">
+                <a:tableStyleId>{5C22544A-7EE6-4342-B048-85BDC9FD1C3A}</a:tableStyleId>
+              </a:tblPr>
+              <a:tblGrid>
+                <a:gridCol w="1502228"/>
+                <a:gridCol w="1502228"/>
+                <a:gridCol w="1502228"/>
+                <a:gridCol w="1502228"/>
+                <a:gridCol w="1502228"/>
+                <a:gridCol w="1502228"/>
+                <a:gridCol w="1502232"/>
+              </a:tblGrid>
+              <a:tr h="457200">
+                <a:tc>
+                  <a:txBody>
+                    <a:bodyPr/>
+                    <a:lstStyle/>
+                    <a:p>
+                      <a:r>
+                        <a:rPr sz="1400" b="1"/>
+                        <a:t>cell</a:t>
+                      </a:r>
+                    </a:p>
+                  </a:txBody>
+                  <a:tcPr/>
+                </a:tc>
+                <a:tc>
+                  <a:txBody>
+                    <a:bodyPr/>
+                    <a:lstStyle/>
+                    <a:p>
+                      <a:r>
+                        <a:rPr sz="1400" b="1"/>
+                        <a:t>system</a:t>
+                      </a:r>
+                    </a:p>
+                  </a:txBody>
+                  <a:tcPr/>
+                </a:tc>
+                <a:tc>
+                  <a:txBody>
+                    <a:bodyPr/>
+                    <a:lstStyle/>
+                    <a:p>
+                      <a:r>
+                        <a:rPr sz="1400" b="1"/>
+                        <a:t>harness</a:t>
+                      </a:r>
+                    </a:p>
+                  </a:txBody>
+                  <a:tcPr/>
+                </a:tc>
+                <a:tc>
+                  <a:txBody>
+                    <a:bodyPr/>
+                    <a:lstStyle/>
+                    <a:p>
+                      <a:r>
+                        <a:rPr sz="1400" b="1"/>
+                        <a:t>tests</a:t>
+                      </a:r>
+                    </a:p>
+                  </a:txBody>
+                  <a:tcPr/>
+                </a:tc>
+                <a:tc>
+                  <a:txBody>
+                    <a:bodyPr/>
+                    <a:lstStyle/>
+                    <a:p>
+                      <a:r>
+                        <a:rPr sz="1400" b="1"/>
+                        <a:t>gaps</a:t>
+                      </a:r>
+                    </a:p>
+                  </a:txBody>
+                  <a:tcPr/>
+                </a:tc>
+                <a:tc>
+                  <a:txBody>
+                    <a:bodyPr/>
+                    <a:lstStyle/>
+                    <a:p>
+                      <a:r>
+                        <a:rPr sz="1400" b="1"/>
+                        <a:t>source</a:t>
+                      </a:r>
+                    </a:p>
+                  </a:txBody>
+                  <a:tcPr/>
+                </a:tc>
+                <a:tc>
+                  <a:txBody>
+                    <a:bodyPr/>
+                    <a:lstStyle/>
+                    <a:p>
+                      <a:r>
+                        <a:rPr sz="1400" b="1"/>
+                        <a:t>notes</a:t>
+                      </a:r>
+                    </a:p>
+                  </a:txBody>
+                  <a:tcPr/>
+                </a:tc>
+              </a:tr>
+              <a:tr h="457200">
+                <a:tc>
+                  <a:txBody>
+                    <a:bodyPr/>
+                    <a:lstStyle/>
+                    <a:p>
+                      <a:r>
+                        <a:rPr sz="1400"/>
+                        <a:t>exp1_full</a:t>
+                      </a:r>
+                    </a:p>
+                  </a:txBody>
+                  <a:tcPr/>
+                </a:tc>
+                <a:tc>
+                  <a:txBody>
+                    <a:bodyPr/>
+                    <a:lstStyle/>
+                    <a:p>
+                      <a:r>
+                        <a:rPr sz="1400"/>
+                        <a:t>✓</a:t>
+                      </a:r>
+                    </a:p>
+                  </a:txBody>
+                  <a:tcPr/>
+                </a:tc>
+                <a:tc>
+                  <a:txBody>
+                    <a:bodyPr/>
+                    <a:lstStyle/>
+                    <a:p>
+                      <a:r>
+                        <a:rPr sz="1400"/>
+                        <a:t>✓</a:t>
+                      </a:r>
+                    </a:p>
+                  </a:txBody>
+                  <a:tcPr/>
+                </a:tc>
+                <a:tc>
+                  <a:txBody>
+                    <a:bodyPr/>
+                    <a:lstStyle/>
+                    <a:p>
+                      <a:r>
+                        <a:rPr sz="1400"/>
+                        <a:t>✓</a:t>
+                      </a:r>
+                    </a:p>
+                  </a:txBody>
+                  <a:tcPr/>
+                </a:tc>
+                <a:tc>
+                  <a:txBody>
+                    <a:bodyPr/>
+                    <a:lstStyle/>
+                    <a:p>
+                      <a:r>
+                        <a:rPr sz="1400"/>
+                        <a:t>✓</a:t>
+                      </a:r>
+                    </a:p>
+                  </a:txBody>
+                  <a:tcPr/>
+                </a:tc>
+                <a:tc>
+                  <a:txBody>
+                    <a:bodyPr/>
+                    <a:lstStyle/>
+                    <a:p>
+                      <a:r>
+                        <a:rPr sz="1400"/>
+                        <a:t>—</a:t>
+                      </a:r>
+                    </a:p>
+                  </a:txBody>
+                  <a:tcPr/>
+                </a:tc>
+                <a:tc>
+                  <a:txBody>
+                    <a:bodyPr/>
+                    <a:lstStyle/>
+                    <a:p>
+                      <a:r>
+                        <a:rPr sz="1400"/>
+                        <a:t>control A (the +110 winner)</a:t>
+                      </a:r>
+                    </a:p>
+                  </a:txBody>
+                  <a:tcPr/>
+                </a:tc>
+              </a:tr>
+              <a:tr h="457200">
+                <a:tc>
+                  <a:txBody>
+                    <a:bodyPr/>
+                    <a:lstStyle/>
+                    <a:p>
+                      <a:r>
+                        <a:rPr sz="1400"/>
+                        <a:t>exp1_gaps_only</a:t>
+                      </a:r>
+                    </a:p>
+                  </a:txBody>
+                  <a:tcPr/>
+                </a:tc>
+                <a:tc>
+                  <a:txBody>
+                    <a:bodyPr/>
+                    <a:lstStyle/>
+                    <a:p>
+                      <a:r>
+                        <a:rPr sz="1400"/>
+                        <a:t>✓</a:t>
+                      </a:r>
+                    </a:p>
+                  </a:txBody>
+                  <a:tcPr/>
+                </a:tc>
+                <a:tc>
+                  <a:txBody>
+                    <a:bodyPr/>
+                    <a:lstStyle/>
+                    <a:p>
+                      <a:r>
+                        <a:rPr sz="1400"/>
+                        <a:t>✓</a:t>
+                      </a:r>
+                    </a:p>
+                  </a:txBody>
+                  <a:tcPr/>
+                </a:tc>
+                <a:tc>
+                  <a:txBody>
+                    <a:bodyPr/>
+                    <a:lstStyle/>
+                    <a:p>
+                      <a:r>
+                        <a:rPr sz="1400"/>
+                        <a:t>—</a:t>
+                      </a:r>
+                    </a:p>
+                  </a:txBody>
+                  <a:tcPr/>
+                </a:tc>
+                <a:tc>
+                  <a:txBody>
+                    <a:bodyPr/>
+                    <a:lstStyle/>
+                    <a:p>
+                      <a:r>
+                        <a:rPr sz="1400"/>
+                        <a:t>✓</a:t>
+                      </a:r>
+                    </a:p>
+                  </a:txBody>
+                  <a:tcPr/>
+                </a:tc>
+                <a:tc>
+                  <a:txBody>
+                    <a:bodyPr/>
+                    <a:lstStyle/>
+                    <a:p>
+                      <a:r>
+                        <a:rPr sz="1400"/>
+                        <a:t>—</a:t>
+                      </a:r>
+                    </a:p>
+                  </a:txBody>
+                  <a:tcPr/>
+                </a:tc>
+                <a:tc>
+                  <a:txBody>
+                    <a:bodyPr/>
+                    <a:lstStyle/>
+                    <a:p>
+                      <a:r>
+                        <a:rPr sz="1400"/>
+                        <a:t>strip tests from exp1</a:t>
+                      </a:r>
+                    </a:p>
+                  </a:txBody>
+                  <a:tcPr/>
+                </a:tc>
+              </a:tr>
+              <a:tr h="457200">
+                <a:tc>
+                  <a:txBody>
+                    <a:bodyPr/>
+                    <a:lstStyle/>
+                    <a:p>
+                      <a:r>
+                        <a:rPr sz="1400"/>
+                        <a:t>exp1_tests_only</a:t>
+                      </a:r>
+                    </a:p>
+                  </a:txBody>
+                  <a:tcPr/>
+                </a:tc>
+                <a:tc>
+                  <a:txBody>
+                    <a:bodyPr/>
+                    <a:lstStyle/>
+                    <a:p>
+                      <a:r>
+                        <a:rPr sz="1400"/>
+                        <a:t>✓</a:t>
+                      </a:r>
+                    </a:p>
+                  </a:txBody>
+                  <a:tcPr/>
+                </a:tc>
+                <a:tc>
+                  <a:txBody>
+                    <a:bodyPr/>
+                    <a:lstStyle/>
+                    <a:p>
+                      <a:r>
+                        <a:rPr sz="1400"/>
+                        <a:t>✓</a:t>
+                      </a:r>
+                    </a:p>
+                  </a:txBody>
+                  <a:tcPr/>
+                </a:tc>
+                <a:tc>
+                  <a:txBody>
+                    <a:bodyPr/>
+                    <a:lstStyle/>
+                    <a:p>
+                      <a:r>
+                        <a:rPr sz="1400"/>
+                        <a:t>✓</a:t>
+                      </a:r>
+                    </a:p>
+                  </a:txBody>
+                  <a:tcPr/>
+                </a:tc>
+                <a:tc>
+                  <a:txBody>
+                    <a:bodyPr/>
+                    <a:lstStyle/>
+                    <a:p>
+                      <a:r>
+                        <a:rPr sz="1400"/>
+                        <a:t>—</a:t>
+                      </a:r>
+                    </a:p>
+                  </a:txBody>
+                  <a:tcPr/>
+                </a:tc>
+                <a:tc>
+                  <a:txBody>
+                    <a:bodyPr/>
+                    <a:lstStyle/>
+                    <a:p>
+                      <a:r>
+                        <a:rPr sz="1400"/>
+                        <a:t>—</a:t>
+                      </a:r>
+                    </a:p>
+                  </a:txBody>
+                  <a:tcPr/>
+                </a:tc>
+                <a:tc>
+                  <a:txBody>
+                    <a:bodyPr/>
+                    <a:lstStyle/>
+                    <a:p>
+                      <a:r>
+                        <a:rPr sz="1400"/>
+                        <a:t>strip gaps from exp1</a:t>
+                      </a:r>
+                    </a:p>
+                  </a:txBody>
+                  <a:tcPr/>
+                </a:tc>
+              </a:tr>
+              <a:tr h="457200">
+                <a:tc>
+                  <a:txBody>
+                    <a:bodyPr/>
+                    <a:lstStyle/>
+                    <a:p>
+                      <a:r>
+                        <a:rPr sz="1400"/>
+                        <a:t>exp2_source</a:t>
+                      </a:r>
+                    </a:p>
+                  </a:txBody>
+                  <a:tcPr/>
+                </a:tc>
+                <a:tc>
+                  <a:txBody>
+                    <a:bodyPr/>
+                    <a:lstStyle/>
+                    <a:p>
+                      <a:r>
+                        <a:rPr sz="1400"/>
+                        <a:t>✓</a:t>
+                      </a:r>
+                    </a:p>
+                  </a:txBody>
+                  <a:tcPr/>
+                </a:tc>
+                <a:tc>
+                  <a:txBody>
+                    <a:bodyPr/>
+                    <a:lstStyle/>
+                    <a:p>
+                      <a:r>
+                        <a:rPr sz="1400"/>
+                        <a:t>✓</a:t>
+                      </a:r>
+                    </a:p>
+                  </a:txBody>
+                  <a:tcPr/>
+                </a:tc>
+                <a:tc>
+                  <a:txBody>
+                    <a:bodyPr/>
+                    <a:lstStyle/>
+                    <a:p>
+                      <a:r>
+                        <a:rPr sz="1400"/>
+                        <a:t>—</a:t>
+                      </a:r>
+                    </a:p>
+                  </a:txBody>
+                  <a:tcPr/>
+                </a:tc>
+                <a:tc>
+                  <a:txBody>
+                    <a:bodyPr/>
+                    <a:lstStyle/>
+                    <a:p>
+                      <a:r>
+                        <a:rPr sz="1400"/>
+                        <a:t>—</a:t>
+                      </a:r>
+                    </a:p>
+                  </a:txBody>
+                  <a:tcPr/>
+                </a:tc>
+                <a:tc>
+                  <a:txBody>
+                    <a:bodyPr/>
+                    <a:lstStyle/>
+                    <a:p>
+                      <a:r>
+                        <a:rPr sz="1400"/>
+                        <a:t>✓</a:t>
+                      </a:r>
+                    </a:p>
+                  </a:txBody>
+                  <a:tcPr/>
+                </a:tc>
+                <a:tc>
+                  <a:txBody>
+                    <a:bodyPr/>
+                    <a:lstStyle/>
+                    <a:p>
+                      <a:r>
+                        <a:rPr sz="1400"/>
+                        <a:t>control B (assert_no_tests on)</a:t>
+                      </a:r>
+                    </a:p>
+                  </a:txBody>
+                  <a:tcPr/>
+                </a:tc>
+              </a:tr>
+              <a:tr h="457200">
+                <a:tc>
+                  <a:txBody>
+                    <a:bodyPr/>
+                    <a:lstStyle/>
+                    <a:p>
+                      <a:r>
+                        <a:rPr sz="1400"/>
+                        <a:t>exp2_plus_gaps</a:t>
+                      </a:r>
+                    </a:p>
+                  </a:txBody>
+                  <a:tcPr/>
+                </a:tc>
+                <a:tc>
+                  <a:txBody>
+                    <a:bodyPr/>
+                    <a:lstStyle/>
+                    <a:p>
+                      <a:r>
+                        <a:rPr sz="1400"/>
+                        <a:t>✓</a:t>
+                      </a:r>
+                    </a:p>
+                  </a:txBody>
+                  <a:tcPr/>
+                </a:tc>
+                <a:tc>
+                  <a:txBody>
+                    <a:bodyPr/>
+                    <a:lstStyle/>
+                    <a:p>
+                      <a:r>
+                        <a:rPr sz="1400"/>
+                        <a:t>✓</a:t>
+                      </a:r>
+                    </a:p>
+                  </a:txBody>
+                  <a:tcPr/>
+                </a:tc>
+                <a:tc>
+                  <a:txBody>
+                    <a:bodyPr/>
+                    <a:lstStyle/>
+                    <a:p>
+                      <a:r>
+                        <a:rPr sz="1400"/>
+                        <a:t>—</a:t>
+                      </a:r>
+                    </a:p>
+                  </a:txBody>
+                  <a:tcPr/>
+                </a:tc>
+                <a:tc>
+                  <a:txBody>
+                    <a:bodyPr/>
+                    <a:lstStyle/>
+                    <a:p>
+                      <a:r>
+                        <a:rPr sz="1400"/>
+                        <a:t>✓</a:t>
+                      </a:r>
+                    </a:p>
+                  </a:txBody>
+                  <a:tcPr/>
+                </a:tc>
+                <a:tc>
+                  <a:txBody>
+                    <a:bodyPr/>
+                    <a:lstStyle/>
+                    <a:p>
+                      <a:r>
+                        <a:rPr sz="1400"/>
+                        <a:t>✓</a:t>
+                      </a:r>
+                    </a:p>
+                  </a:txBody>
+                  <a:tcPr/>
+                </a:tc>
+                <a:tc>
+                  <a:txBody>
+                    <a:bodyPr/>
+                    <a:lstStyle/>
+                    <a:p>
+                      <a:r>
+                        <a:rPr sz="1400"/>
+                        <a:t>source + gaps, no tests</a:t>
+                      </a:r>
+                    </a:p>
+                  </a:txBody>
+                  <a:tcPr/>
+                </a:tc>
+              </a:tr>
+              <a:tr h="457200">
+                <a:tc>
+                  <a:txBody>
+                    <a:bodyPr/>
+                    <a:lstStyle/>
+                    <a:p>
+                      <a:r>
+                        <a:rPr sz="1400"/>
+                        <a:t>exp2_plus_tests</a:t>
+                      </a:r>
+                    </a:p>
+                  </a:txBody>
+                  <a:tcPr/>
+                </a:tc>
+                <a:tc>
+                  <a:txBody>
+                    <a:bodyPr/>
+                    <a:lstStyle/>
+                    <a:p>
+                      <a:r>
+                        <a:rPr sz="1400"/>
+                        <a:t>✓</a:t>
+                      </a:r>
+                    </a:p>
+                  </a:txBody>
+                  <a:tcPr/>
+                </a:tc>
+                <a:tc>
+                  <a:txBody>
+                    <a:bodyPr/>
+                    <a:lstStyle/>
+                    <a:p>
+                      <a:r>
+                        <a:rPr sz="1400"/>
+                        <a:t>✓</a:t>
+                      </a:r>
+                    </a:p>
+                  </a:txBody>
+                  <a:tcPr/>
+                </a:tc>
+                <a:tc>
+                  <a:txBody>
+                    <a:bodyPr/>
+                    <a:lstStyle/>
+                    <a:p>
+                      <a:r>
+                        <a:rPr sz="1400"/>
+                        <a:t>✓</a:t>
+                      </a:r>
+                    </a:p>
+                  </a:txBody>
+                  <a:tcPr/>
+                </a:tc>
+                <a:tc>
+                  <a:txBody>
+                    <a:bodyPr/>
+                    <a:lstStyle/>
+                    <a:p>
+                      <a:r>
+                        <a:rPr sz="1400"/>
+                        <a:t>—</a:t>
+                      </a:r>
+                    </a:p>
+                  </a:txBody>
+                  <a:tcPr/>
+                </a:tc>
+                <a:tc>
+                  <a:txBody>
+                    <a:bodyPr/>
+                    <a:lstStyle/>
+                    <a:p>
+                      <a:r>
+                        <a:rPr sz="1400"/>
+                        <a:t>✓</a:t>
+                      </a:r>
+                    </a:p>
+                  </a:txBody>
+                  <a:tcPr/>
+                </a:tc>
+                <a:tc>
+                  <a:txBody>
+                    <a:bodyPr/>
+                    <a:lstStyle/>
+                    <a:p>
+                      <a:r>
+                        <a:rPr sz="1400"/>
+                        <a:t>source + tests, no gaps</a:t>
+                      </a:r>
+                    </a:p>
+                  </a:txBody>
+                  <a:tcPr/>
+                </a:tc>
+              </a:tr>
+              <a:tr h="457200">
+                <a:tc>
+                  <a:txBody>
+                    <a:bodyPr/>
+                    <a:lstStyle/>
+                    <a:p>
+                      <a:r>
+                        <a:rPr sz="1400"/>
+                        <a:t>random</a:t>
+                      </a:r>
+                    </a:p>
+                  </a:txBody>
+                  <a:tcPr/>
+                </a:tc>
+                <a:tc>
+                  <a:txBody>
+                    <a:bodyPr/>
+                    <a:lstStyle/>
+                    <a:p>
+                      <a:r>
+                        <a:rPr sz="1400"/>
+                        <a:t>—</a:t>
+                      </a:r>
+                    </a:p>
+                  </a:txBody>
+                  <a:tcPr/>
+                </a:tc>
+                <a:tc>
+                  <a:txBody>
+                    <a:bodyPr/>
+                    <a:lstStyle/>
+                    <a:p>
+                      <a:r>
+                        <a:rPr sz="1400"/>
+                        <a:t>—</a:t>
+                      </a:r>
+                    </a:p>
+                  </a:txBody>
+                  <a:tcPr/>
+                </a:tc>
+                <a:tc>
+                  <a:txBody>
+                    <a:bodyPr/>
+                    <a:lstStyle/>
+                    <a:p>
+                      <a:r>
+                        <a:rPr sz="1400"/>
+                        <a:t>—</a:t>
+                      </a:r>
+                    </a:p>
+                  </a:txBody>
+                  <a:tcPr/>
+                </a:tc>
+                <a:tc>
+                  <a:txBody>
+                    <a:bodyPr/>
+                    <a:lstStyle/>
+                    <a:p>
+                      <a:r>
+                        <a:rPr sz="1400"/>
+                        <a:t>—</a:t>
+                      </a:r>
+                    </a:p>
+                  </a:txBody>
+                  <a:tcPr/>
+                </a:tc>
+                <a:tc>
+                  <a:txBody>
+                    <a:bodyPr/>
+                    <a:lstStyle/>
+                    <a:p>
+                      <a:r>
+                        <a:rPr sz="1400"/>
+                        <a:t>—</a:t>
+                      </a:r>
+                    </a:p>
+                  </a:txBody>
+                  <a:tcPr/>
+                </a:tc>
+                <a:tc>
+                  <a:txBody>
+                    <a:bodyPr/>
+                    <a:lstStyle/>
+                    <a:p>
+                      <a:r>
+                        <a:rPr sz="1400"/>
+                        <a:t>no LLM; Random(42) body</a:t>
+                      </a:r>
+                    </a:p>
+                  </a:txBody>
+                  <a:tcPr/>
+                </a:tc>
+              </a:tr>
+            </a:tbl>
+          </a:graphicData>
+        </a:graphic>
+      </p:graphicFrame>
+      <p:sp>
+        <p:nvSpPr>
+          <p:cNvPr id="5" name="TextBox 4"/>
+          <p:cNvSpPr txBox="1"/>
+          <p:nvPr/>
+        </p:nvSpPr>
+        <p:spPr>
+          <a:xfrm>
+            <a:off x="548640" y="5577840"/>
+            <a:ext cx="11155680" cy="4846320"/>
+          </a:xfrm>
+          <a:prstGeom prst="rect">
+            <a:avLst/>
+          </a:prstGeom>
+          <a:noFill/>
+        </p:spPr>
+        <p:txBody>
+          <a:bodyPr wrap="square">
+            <a:spAutoFit/>
+          </a:bodyPr>
+          <a:lstStyle/>
+          <a:p>
+            <a:pPr>
+              <a:spcAft>
+                <a:spcPts val="600"/>
+              </a:spcAft>
+            </a:pPr>
+            <a:r>
+              <a:rPr sz="1400"/>
+              <a:t>Each ✓ is a Jinja block rendered into the same base template;</a:t>
+            </a:r>
+          </a:p>
+          <a:p>
+            <a:pPr>
+              <a:spcAft>
+                <a:spcPts val="600"/>
+              </a:spcAft>
+            </a:pPr>
+            <a:r>
+              <a:rPr sz="1400"/>
+              <a:t>the rest of the prompt (task description, output rules, JSON schema) is identical.</a:t>
+            </a:r>
+          </a:p>
+          <a:p>
+            <a:pPr>
+              <a:spcAft>
+                <a:spcPts val="600"/>
+              </a:spcAft>
+            </a:pPr>
+            <a:r>
+              <a:rPr sz="1400"/>
+              <a:t>This isolates the causal effect of each context block instead of confounding them.</a:t>
+            </a:r>
+          </a:p>
+        </p:txBody>
+      </p:sp>
+    </p:spTree>
+  </p:cSld>
+  <p:clrMapOvr>
+    <a:masterClrMapping/>
+  </p:clrMapOvr>
+</p:sld>
+</file>
+
+<file path=ppt/slides/slide21.xml><?xml version="1.0" encoding="utf-8"?>
 <p:sld xmlns:a="http://schemas.openxmlformats.org/drawingml/2006/main" xmlns:p="http://schemas.openxmlformats.org/presentationml/2006/main" xmlns:r="http://schemas.openxmlformats.org/officeDocument/2006/relationships">
   <p:cSld>
     <p:spTree>
@@ -6321,7 +9107,7 @@
 </p:sld>
 </file>
 
-<file path=ppt/slides/slide17.xml><?xml version="1.0" encoding="utf-8"?>
+<file path=ppt/slides/slide22.xml><?xml version="1.0" encoding="utf-8"?>
 <p:sld xmlns:a="http://schemas.openxmlformats.org/drawingml/2006/main" xmlns:p="http://schemas.openxmlformats.org/presentationml/2006/main" xmlns:r="http://schemas.openxmlformats.org/officeDocument/2006/relationships">
   <p:cSld>
     <p:spTree>
@@ -6545,7 +9331,7 @@
 </p:sld>
 </file>
 
-<file path=ppt/slides/slide18.xml><?xml version="1.0" encoding="utf-8"?>
+<file path=ppt/slides/slide23.xml><?xml version="1.0" encoding="utf-8"?>
 <p:sld xmlns:a="http://schemas.openxmlformats.org/drawingml/2006/main" xmlns:p="http://schemas.openxmlformats.org/presentationml/2006/main" xmlns:r="http://schemas.openxmlformats.org/officeDocument/2006/relationships">
   <p:cSld>
     <p:spTree>
@@ -6802,7 +9588,7 @@
 </p:sld>
 </file>
 
-<file path=ppt/slides/slide19.xml><?xml version="1.0" encoding="utf-8"?>
+<file path=ppt/slides/slide24.xml><?xml version="1.0" encoding="utf-8"?>
 <p:sld xmlns:a="http://schemas.openxmlformats.org/drawingml/2006/main" xmlns:p="http://schemas.openxmlformats.org/presentationml/2006/main" xmlns:r="http://schemas.openxmlformats.org/officeDocument/2006/relationships">
   <p:cSld>
     <p:spTree>
@@ -7110,7 +9896,7 @@
 </p:sld>
 </file>
 
-<file path=ppt/slides/slide2.xml><?xml version="1.0" encoding="utf-8"?>
+<file path=ppt/slides/slide25.xml><?xml version="1.0" encoding="utf-8"?>
 <p:sld xmlns:a="http://schemas.openxmlformats.org/drawingml/2006/main" xmlns:p="http://schemas.openxmlformats.org/presentationml/2006/main" xmlns:r="http://schemas.openxmlformats.org/officeDocument/2006/relationships">
   <p:cSld>
     <p:spTree>
@@ -7144,7 +9930,7 @@
           <a:p>
             <a:r>
               <a:rPr sz="3200" b="1"/>
-              <a:t>The research question</a:t>
+              <a:t>Decision asks</a:t>
             </a:r>
           </a:p>
         </p:txBody>
@@ -7152,35 +9938,6 @@
       <p:sp>
         <p:nvSpPr>
           <p:cNvPr id="3" name="TextBox 2"/>
-          <p:cNvSpPr txBox="1"/>
-          <p:nvPr/>
-        </p:nvSpPr>
-        <p:spPr>
-          <a:xfrm>
-            <a:off x="457200" y="1051560"/>
-            <a:ext cx="11247120" cy="457200"/>
-          </a:xfrm>
-          <a:prstGeom prst="rect">
-            <a:avLst/>
-          </a:prstGeom>
-          <a:noFill/>
-        </p:spPr>
-        <p:txBody>
-          <a:bodyPr wrap="none">
-            <a:spAutoFit/>
-          </a:bodyPr>
-          <a:lstStyle/>
-          <a:p>
-            <a:r>
-              <a:rPr sz="1600" b="0"/>
-              <a:t>Given a stable pipeline, does gap-targeted synthesis beat source-only?</a:t>
-            </a:r>
-          </a:p>
-        </p:txBody>
-      </p:sp>
-      <p:sp>
-        <p:nvSpPr>
-          <p:cNvPr id="4" name="TextBox 3"/>
           <p:cNvSpPr txBox="1"/>
           <p:nvPr/>
         </p:nvSpPr>
@@ -7207,7 +9964,7 @@
             </a:pPr>
             <a:r>
               <a:rPr sz="1800"/>
-              <a:t>Exp1  (gap-targeted):   prompt = harness + coverage gaps + a few upstream tests</a:t>
+              <a:t>1.  Authorize a frontier-model rerun of Experiment B.</a:t>
             </a:r>
           </a:p>
           <a:p>
@@ -7218,7 +9975,29 @@
             </a:pPr>
             <a:r>
               <a:rPr sz="1800"/>
-              <a:t>Exp2  (source-only):    prompt = harness + library source code, no tests, no gaps</a:t>
+              <a:t>    GPT-4o / Claude Sonnet on the 7-cell ablation. ~$10.</a:t>
+            </a:r>
+          </a:p>
+          <a:p>
+            <a:pPr>
+              <a:spcAft>
+                <a:spcPts val="600"/>
+              </a:spcAft>
+            </a:pPr>
+            <a:r>
+              <a:rPr sz="1800"/>
+              <a:t>    Specifically tests whether exp1_gaps_only's collapse is model-specific</a:t>
+            </a:r>
+          </a:p>
+          <a:p>
+            <a:pPr>
+              <a:spcAft>
+                <a:spcPts val="600"/>
+              </a:spcAft>
+            </a:pPr>
+            <a:r>
+              <a:rPr sz="1800"/>
+              <a:t>    and whether exp2_plus_gaps stays ahead of exp1_full.</a:t>
             </a:r>
           </a:p>
           <a:p>
@@ -7240,7 +10019,7 @@
             </a:pPr>
             <a:r>
               <a:rPr sz="1800"/>
-              <a:t>Shared: 3-test RE2 fixture (Regexp.BigRef, NamedCaptures, CaptureNames),</a:t>
+              <a:t>2.  Commit to per-target prompt templates for any new target in the A/B set.</a:t>
             </a:r>
           </a:p>
           <a:p>
@@ -7251,7 +10030,7 @@
             </a:pPr>
             <a:r>
               <a:rPr sz="1800"/>
-              <a:t>llama-3.1-8b-instruct, 3 samples per cell, T=0.7, top_p=0.95, identical context otherwise.</a:t>
+              <a:t>    RE2 shows this is non-optional  (regex for RE2, SQL for sqlite, …).</a:t>
             </a:r>
           </a:p>
           <a:p>
@@ -7273,7 +10052,7 @@
             </a:pPr>
             <a:r>
               <a:rPr sz="1800"/>
-              <a:t>Evaluation: raw seed-corpus edge/line coverage on a standalone seed_replay binary</a:t>
+              <a:t>3.  Promote exp2_plus_gaps to the reference recipe going forward.</a:t>
             </a:r>
           </a:p>
           <a:p>
@@ -7284,7 +10063,7 @@
             </a:pPr>
             <a:r>
               <a:rPr sz="1800"/>
-              <a:t>(same LLVMFuzzerTestOneInput as the libFuzzer target, but without injected main()).</a:t>
+              <a:t>    Source + coverage gaps (no tests) is the efficient frontier on this fixture.</a:t>
             </a:r>
           </a:p>
           <a:p>
@@ -7306,7 +10085,7 @@
             </a:pPr>
             <a:r>
               <a:rPr sz="1800"/>
-              <a:t>This deck is about seed-corpus quality, not 24h libFuzzer-campaign coverage.</a:t>
+              <a:t>4.  Unblock Experiment C: build/fuzzer/ rebuild + ~9 CPU-hours for 1h×3-trial</a:t>
             </a:r>
           </a:p>
           <a:p>
@@ -7317,7 +10096,18 @@
             </a:pPr>
             <a:r>
               <a:rPr sz="1800"/>
-              <a:t>That number needs cluster time we don't yet have.</a:t>
+              <a:t>    campaigns. Or the earlier 29,440 CPU-hour 24h-campaign ask — either way the</a:t>
+            </a:r>
+          </a:p>
+          <a:p>
+            <a:pPr>
+              <a:spcAft>
+                <a:spcPts val="600"/>
+              </a:spcAft>
+            </a:pPr>
+            <a:r>
+              <a:rPr sz="1800"/>
+              <a:t>    regex-format seeds are the right input to that run.</a:t>
             </a:r>
           </a:p>
         </p:txBody>
@@ -7330,231 +10120,7 @@
 </p:sld>
 </file>
 
-<file path=ppt/slides/slide20.xml><?xml version="1.0" encoding="utf-8"?>
-<p:sld xmlns:a="http://schemas.openxmlformats.org/drawingml/2006/main" xmlns:p="http://schemas.openxmlformats.org/presentationml/2006/main" xmlns:r="http://schemas.openxmlformats.org/officeDocument/2006/relationships">
-  <p:cSld>
-    <p:spTree>
-      <p:nvGrpSpPr>
-        <p:cNvPr id="1" name=""/>
-        <p:cNvGrpSpPr/>
-        <p:nvPr/>
-      </p:nvGrpSpPr>
-      <p:grpSpPr/>
-      <p:sp>
-        <p:nvSpPr>
-          <p:cNvPr id="2" name="TextBox 1"/>
-          <p:cNvSpPr txBox="1"/>
-          <p:nvPr/>
-        </p:nvSpPr>
-        <p:spPr>
-          <a:xfrm>
-            <a:off x="457200" y="274320"/>
-            <a:ext cx="11247120" cy="822960"/>
-          </a:xfrm>
-          <a:prstGeom prst="rect">
-            <a:avLst/>
-          </a:prstGeom>
-          <a:noFill/>
-        </p:spPr>
-        <p:txBody>
-          <a:bodyPr wrap="none">
-            <a:spAutoFit/>
-          </a:bodyPr>
-          <a:lstStyle/>
-          <a:p>
-            <a:r>
-              <a:rPr sz="3200" b="1"/>
-              <a:t>Decision asks</a:t>
-            </a:r>
-          </a:p>
-        </p:txBody>
-      </p:sp>
-      <p:sp>
-        <p:nvSpPr>
-          <p:cNvPr id="3" name="TextBox 2"/>
-          <p:cNvSpPr txBox="1"/>
-          <p:nvPr/>
-        </p:nvSpPr>
-        <p:spPr>
-          <a:xfrm>
-            <a:off x="548640" y="1645920"/>
-            <a:ext cx="11155680" cy="4846320"/>
-          </a:xfrm>
-          <a:prstGeom prst="rect">
-            <a:avLst/>
-          </a:prstGeom>
-          <a:noFill/>
-        </p:spPr>
-        <p:txBody>
-          <a:bodyPr wrap="square">
-            <a:spAutoFit/>
-          </a:bodyPr>
-          <a:lstStyle/>
-          <a:p>
-            <a:pPr>
-              <a:spcAft>
-                <a:spcPts val="600"/>
-              </a:spcAft>
-            </a:pPr>
-            <a:r>
-              <a:rPr sz="1800"/>
-              <a:t>1.  Authorize a frontier-model rerun of Experiment B.</a:t>
-            </a:r>
-          </a:p>
-          <a:p>
-            <a:pPr>
-              <a:spcAft>
-                <a:spcPts val="600"/>
-              </a:spcAft>
-            </a:pPr>
-            <a:r>
-              <a:rPr sz="1800"/>
-              <a:t>    GPT-4o / Claude Sonnet on the 7-cell ablation. ~$10.</a:t>
-            </a:r>
-          </a:p>
-          <a:p>
-            <a:pPr>
-              <a:spcAft>
-                <a:spcPts val="600"/>
-              </a:spcAft>
-            </a:pPr>
-            <a:r>
-              <a:rPr sz="1800"/>
-              <a:t>    Specifically tests whether exp1_gaps_only's collapse is model-specific</a:t>
-            </a:r>
-          </a:p>
-          <a:p>
-            <a:pPr>
-              <a:spcAft>
-                <a:spcPts val="600"/>
-              </a:spcAft>
-            </a:pPr>
-            <a:r>
-              <a:rPr sz="1800"/>
-              <a:t>    and whether exp2_plus_gaps stays ahead of exp1_full.</a:t>
-            </a:r>
-          </a:p>
-          <a:p>
-            <a:pPr>
-              <a:spcAft>
-                <a:spcPts val="600"/>
-              </a:spcAft>
-            </a:pPr>
-            <a:r>
-              <a:rPr sz="1800"/>
-              <a:t/>
-            </a:r>
-          </a:p>
-          <a:p>
-            <a:pPr>
-              <a:spcAft>
-                <a:spcPts val="600"/>
-              </a:spcAft>
-            </a:pPr>
-            <a:r>
-              <a:rPr sz="1800"/>
-              <a:t>2.  Commit to per-target prompt templates for any new target in the A/B set.</a:t>
-            </a:r>
-          </a:p>
-          <a:p>
-            <a:pPr>
-              <a:spcAft>
-                <a:spcPts val="600"/>
-              </a:spcAft>
-            </a:pPr>
-            <a:r>
-              <a:rPr sz="1800"/>
-              <a:t>    RE2 shows this is non-optional  (regex for RE2, SQL for sqlite, …).</a:t>
-            </a:r>
-          </a:p>
-          <a:p>
-            <a:pPr>
-              <a:spcAft>
-                <a:spcPts val="600"/>
-              </a:spcAft>
-            </a:pPr>
-            <a:r>
-              <a:rPr sz="1800"/>
-              <a:t/>
-            </a:r>
-          </a:p>
-          <a:p>
-            <a:pPr>
-              <a:spcAft>
-                <a:spcPts val="600"/>
-              </a:spcAft>
-            </a:pPr>
-            <a:r>
-              <a:rPr sz="1800"/>
-              <a:t>3.  Promote exp2_plus_gaps to the reference recipe going forward.</a:t>
-            </a:r>
-          </a:p>
-          <a:p>
-            <a:pPr>
-              <a:spcAft>
-                <a:spcPts val="600"/>
-              </a:spcAft>
-            </a:pPr>
-            <a:r>
-              <a:rPr sz="1800"/>
-              <a:t>    Source + coverage gaps (no tests) is the efficient frontier on this fixture.</a:t>
-            </a:r>
-          </a:p>
-          <a:p>
-            <a:pPr>
-              <a:spcAft>
-                <a:spcPts val="600"/>
-              </a:spcAft>
-            </a:pPr>
-            <a:r>
-              <a:rPr sz="1800"/>
-              <a:t/>
-            </a:r>
-          </a:p>
-          <a:p>
-            <a:pPr>
-              <a:spcAft>
-                <a:spcPts val="600"/>
-              </a:spcAft>
-            </a:pPr>
-            <a:r>
-              <a:rPr sz="1800"/>
-              <a:t>4.  Unblock Experiment C: build/fuzzer/ rebuild + ~9 CPU-hours for 1h×3-trial</a:t>
-            </a:r>
-          </a:p>
-          <a:p>
-            <a:pPr>
-              <a:spcAft>
-                <a:spcPts val="600"/>
-              </a:spcAft>
-            </a:pPr>
-            <a:r>
-              <a:rPr sz="1800"/>
-              <a:t>    campaigns. Or the earlier 29,440 CPU-hour 24h-campaign ask — either way the</a:t>
-            </a:r>
-          </a:p>
-          <a:p>
-            <a:pPr>
-              <a:spcAft>
-                <a:spcPts val="600"/>
-              </a:spcAft>
-            </a:pPr>
-            <a:r>
-              <a:rPr sz="1800"/>
-              <a:t>    regex-format seeds are the right input to that run.</a:t>
-            </a:r>
-          </a:p>
-        </p:txBody>
-      </p:sp>
-    </p:spTree>
-  </p:cSld>
-  <p:clrMapOvr>
-    <a:masterClrMapping/>
-  </p:clrMapOvr>
-</p:sld>
-</file>
-
-<file path=ppt/slides/slide21.xml><?xml version="1.0" encoding="utf-8"?>
+<file path=ppt/slides/slide26.xml><?xml version="1.0" encoding="utf-8"?>
 <p:sld xmlns:a="http://schemas.openxmlformats.org/drawingml/2006/main" xmlns:p="http://schemas.openxmlformats.org/presentationml/2006/main" xmlns:r="http://schemas.openxmlformats.org/officeDocument/2006/relationships">
   <p:cSld>
     <p:spTree>
@@ -8058,7 +10624,7 @@
           <a:p>
             <a:r>
               <a:rPr sz="3200" b="1"/>
-              <a:t>Recap — the 2026-04-12 stabilization pass</a:t>
+              <a:t>Data flow — one synthesis sample, end to end</a:t>
             </a:r>
           </a:p>
         </p:txBody>
@@ -8087,7 +10653,7 @@
           <a:p>
             <a:r>
               <a:rPr sz="1600" b="0"/>
-              <a:t>Detail: docs/WORK_SO_FAR.md §2-4</a:t>
+              <a:t>Same path for exp1, exp2, and every ablation cell; only the prompt body differs.</a:t>
             </a:r>
           </a:p>
         </p:txBody>
@@ -8120,129 +10686,151 @@
               </a:spcAft>
             </a:pPr>
             <a:r>
-              <a:rPr sz="1700"/>
-              <a:t>Before:  every synthesis call hit max_tokens, multi-sample runs silently cache-collided,</a:t>
-            </a:r>
-          </a:p>
-          <a:p>
-            <a:pPr>
-              <a:spcAft>
-                <a:spcPts val="600"/>
-              </a:spcAft>
-            </a:pPr>
-            <a:r>
-              <a:rPr sz="1700"/>
-              <a:t>         schema placeholders were copied verbatim into degenerate loops.</a:t>
-            </a:r>
-          </a:p>
-          <a:p>
-            <a:pPr>
-              <a:spcAft>
-                <a:spcPts val="600"/>
-              </a:spcAft>
-            </a:pPr>
-            <a:r>
-              <a:rPr sz="1700"/>
-              <a:t/>
-            </a:r>
-          </a:p>
-          <a:p>
-            <a:pPr>
-              <a:spcAft>
-                <a:spcPts val="600"/>
-              </a:spcAft>
-            </a:pPr>
-            <a:r>
-              <a:rPr sz="1700"/>
-              <a:t>Landed:</a:t>
-            </a:r>
-          </a:p>
-          <a:p>
-            <a:pPr>
-              <a:spcAft>
-                <a:spcPts val="600"/>
-              </a:spcAft>
-            </a:pPr>
-            <a:r>
-              <a:rPr sz="1700"/>
-              <a:t>  •  cache key includes max_tokens + cache_salt (3-sample diversity is real now)</a:t>
-            </a:r>
-          </a:p>
-          <a:p>
-            <a:pPr>
-              <a:spcAft>
-                <a:spcPts val="600"/>
-              </a:spcAft>
-            </a:pPr>
-            <a:r>
-              <a:rPr sz="1700"/>
-              <a:t>  •  streaming loop-detector (two signals: window dominance + unique-window ratio)</a:t>
-            </a:r>
-          </a:p>
-          <a:p>
-            <a:pPr>
-              <a:spcAft>
-                <a:spcPts val="600"/>
-              </a:spcAft>
-            </a:pPr>
-            <a:r>
-              <a:rPr sz="1700"/>
-              <a:t>  •  5 prompt templates rewritten with real example values + OUTPUT RULES</a:t>
-            </a:r>
-          </a:p>
-          <a:p>
-            <a:pPr>
-              <a:spcAft>
-                <a:spcPts val="600"/>
-              </a:spcAft>
-            </a:pPr>
-            <a:r>
-              <a:rPr sz="1700"/>
-              <a:t>  •  strict=False cache read, extra='ignore' on PredictionResult</a:t>
-            </a:r>
-          </a:p>
-          <a:p>
-            <a:pPr>
-              <a:spcAft>
-                <a:spcPts val="600"/>
-              </a:spcAft>
-            </a:pPr>
-            <a:r>
-              <a:rPr sz="1700"/>
-              <a:t>  •  29 new unit tests, full suite 106+ green</a:t>
-            </a:r>
-          </a:p>
-          <a:p>
-            <a:pPr>
-              <a:spcAft>
-                <a:spcPts val="600"/>
-              </a:spcAft>
-            </a:pPr>
-            <a:r>
-              <a:rPr sz="1700"/>
-              <a:t/>
-            </a:r>
-          </a:p>
-          <a:p>
-            <a:pPr>
-              <a:spcAft>
-                <a:spcPts val="600"/>
-              </a:spcAft>
-            </a:pPr>
-            <a:r>
-              <a:rPr sz="1700"/>
-              <a:t>Result: 4-cell sanity run completes in ~3 min for ~$0.02.</a:t>
-            </a:r>
-          </a:p>
-          <a:p>
-            <a:pPr>
-              <a:spcAft>
-                <a:spcPts val="600"/>
-              </a:spcAft>
-            </a:pPr>
-            <a:r>
-              <a:rPr sz="1700"/>
-              <a:t>That set the stage for the first real A/B — which surfaced its own bug class.</a:t>
+              <a:rPr sz="1400"/>
+              <a:t>Jinja template  (input_synthesis_regex.j2  |  source_only_synthesis_regex.j2  |  ablation_synthesis_regex.j2)</a:t>
+            </a:r>
+          </a:p>
+          <a:p>
+            <a:pPr>
+              <a:spcAft>
+                <a:spcPts val="600"/>
+              </a:spcAft>
+            </a:pPr>
+            <a:r>
+              <a:rPr sz="1400"/>
+              <a:t>      │   renders {system, harness, [tests?], [gaps?], [source?], task}</a:t>
+            </a:r>
+          </a:p>
+          <a:p>
+            <a:pPr>
+              <a:spcAft>
+                <a:spcPts val="600"/>
+              </a:spcAft>
+            </a:pPr>
+            <a:r>
+              <a:rPr sz="1400"/>
+              <a:t>      ▼</a:t>
+            </a:r>
+          </a:p>
+          <a:p>
+            <a:pPr>
+              <a:spcAft>
+                <a:spcPts val="600"/>
+              </a:spcAft>
+            </a:pPr>
+            <a:r>
+              <a:rPr sz="1400"/>
+              <a:t>LLM call → llama-3.1-8b-instruct   T=0.7  top_p=0.95  streaming + loop detector</a:t>
+            </a:r>
+          </a:p>
+          <a:p>
+            <a:pPr>
+              <a:spcAft>
+                <a:spcPts val="600"/>
+              </a:spcAft>
+            </a:pPr>
+            <a:r>
+              <a:rPr sz="1400"/>
+              <a:t>      │   cache key = (prompt_hash, max_tokens, cache_salt)     → samples don't collide</a:t>
+            </a:r>
+          </a:p>
+          <a:p>
+            <a:pPr>
+              <a:spcAft>
+                <a:spcPts val="600"/>
+              </a:spcAft>
+            </a:pPr>
+            <a:r>
+              <a:rPr sz="1400"/>
+              <a:t>      ▼</a:t>
+            </a:r>
+          </a:p>
+          <a:p>
+            <a:pPr>
+              <a:spcAft>
+                <a:spcPts val="600"/>
+              </a:spcAft>
+            </a:pPr>
+            <a:r>
+              <a:rPr sz="1400"/>
+              <a:t>Raw JSON:   { "regexes": [ { "regex": "(a*)*", "target_gaps": [...], "reasoning": "..." }, ... ] }</a:t>
+            </a:r>
+          </a:p>
+          <a:p>
+            <a:pPr>
+              <a:spcAft>
+                <a:spcPts val="600"/>
+              </a:spcAft>
+            </a:pPr>
+            <a:r>
+              <a:rPr sz="1400"/>
+              <a:t>      │   parse_regex_response()  +  _salvage_objects()  (loop-abort recovery)</a:t>
+            </a:r>
+          </a:p>
+          <a:p>
+            <a:pPr>
+              <a:spcAft>
+                <a:spcPts val="600"/>
+              </a:spcAft>
+            </a:pPr>
+            <a:r>
+              <a:rPr sz="1400"/>
+              <a:t>      ▼</a:t>
+            </a:r>
+          </a:p>
+          <a:p>
+            <a:pPr>
+              <a:spcAft>
+                <a:spcPts val="600"/>
+              </a:spcAft>
+            </a:pPr>
+            <a:r>
+              <a:rPr sz="1400"/>
+              <a:t>Per entry →   [2 sha256-seeded flag bytes]  +  [UTF-8 regex bytes]      clipped to [3, 64] bytes, deduped</a:t>
+            </a:r>
+          </a:p>
+          <a:p>
+            <a:pPr>
+              <a:spcAft>
+                <a:spcPts val="600"/>
+              </a:spcAft>
+            </a:pPr>
+            <a:r>
+              <a:rPr sz="1400"/>
+              <a:t>      ▼</a:t>
+            </a:r>
+          </a:p>
+          <a:p>
+            <a:pPr>
+              <a:spcAft>
+                <a:spcPts val="600"/>
+              </a:spcAft>
+            </a:pPr>
+            <a:r>
+              <a:rPr sz="1400"/>
+              <a:t>seed_*.bin  →  seed_replay (coverage-instrumented RE2)  →  .profraw  →  CoverageProfile JSON</a:t>
+            </a:r>
+          </a:p>
+          <a:p>
+            <a:pPr>
+              <a:spcAft>
+                <a:spcPts val="600"/>
+              </a:spcAft>
+            </a:pPr>
+            <a:r>
+              <a:rPr sz="1400"/>
+              <a:t>      ▼</a:t>
+            </a:r>
+          </a:p>
+          <a:p>
+            <a:pPr>
+              <a:spcAft>
+                <a:spcPts val="600"/>
+              </a:spcAft>
+            </a:pPr>
+            <a:r>
+              <a:rPr sz="1400"/>
+              <a:t>ab_coverage_diff.py   →   per-cell edge/line set-diff + Jaccard + per-file breakdown</a:t>
             </a:r>
           </a:p>
         </p:txBody>
@@ -8289,7 +10877,7 @@
           <a:p>
             <a:r>
               <a:rPr sz="3200" b="1"/>
-              <a:t>First A/B surfaced five more bugs</a:t>
+              <a:t>Recap — the 2026-04-12 stabilization pass</a:t>
             </a:r>
           </a:p>
         </p:txBody>
@@ -8297,6 +10885,35 @@
       <p:sp>
         <p:nvSpPr>
           <p:cNvPr id="3" name="TextBox 2"/>
+          <p:cNvSpPr txBox="1"/>
+          <p:nvPr/>
+        </p:nvSpPr>
+        <p:spPr>
+          <a:xfrm>
+            <a:off x="457200" y="1051560"/>
+            <a:ext cx="11247120" cy="457200"/>
+          </a:xfrm>
+          <a:prstGeom prst="rect">
+            <a:avLst/>
+          </a:prstGeom>
+          <a:noFill/>
+        </p:spPr>
+        <p:txBody>
+          <a:bodyPr wrap="none">
+            <a:spAutoFit/>
+          </a:bodyPr>
+          <a:lstStyle/>
+          <a:p>
+            <a:r>
+              <a:rPr sz="1600" b="0"/>
+              <a:t>Detail: docs/WORK_SO_FAR.md §2-4</a:t>
+            </a:r>
+          </a:p>
+        </p:txBody>
+      </p:sp>
+      <p:sp>
+        <p:nvSpPr>
+          <p:cNvPr id="4" name="TextBox 3"/>
           <p:cNvSpPr txBox="1"/>
           <p:nvPr/>
         </p:nvSpPr>
@@ -8322,29 +10939,29 @@
               </a:spcAft>
             </a:pPr>
             <a:r>
-              <a:rPr sz="1600"/>
-              <a:t>1.  Fixture tests pointed at re2_test.cc, but our build only compiled regexp_test.</a:t>
-            </a:r>
-          </a:p>
-          <a:p>
-            <a:pPr>
-              <a:spcAft>
-                <a:spcPts val="600"/>
-              </a:spcAft>
-            </a:pPr>
-            <a:r>
-              <a:rPr sz="1600"/>
-              <a:t>    Fix: swap fixture to tests that exist in the built binary.</a:t>
-            </a:r>
-          </a:p>
-          <a:p>
-            <a:pPr>
-              <a:spcAft>
-                <a:spcPts val="600"/>
-              </a:spcAft>
-            </a:pPr>
-            <a:r>
-              <a:rPr sz="1600"/>
+              <a:rPr sz="1700"/>
+              <a:t>Before:  every synthesis call hit max_tokens, multi-sample runs silently cache-collided,</a:t>
+            </a:r>
+          </a:p>
+          <a:p>
+            <a:pPr>
+              <a:spcAft>
+                <a:spcPts val="600"/>
+              </a:spcAft>
+            </a:pPr>
+            <a:r>
+              <a:rPr sz="1700"/>
+              <a:t>         schema placeholders were copied verbatim into degenerate loops.</a:t>
+            </a:r>
+          </a:p>
+          <a:p>
+            <a:pPr>
+              <a:spcAft>
+                <a:spcPts val="600"/>
+              </a:spcAft>
+            </a:pPr>
+            <a:r>
+              <a:rPr sz="1700"/>
               <a:t/>
             </a:r>
           </a:p>
@@ -8355,29 +10972,73 @@
               </a:spcAft>
             </a:pPr>
             <a:r>
-              <a:rPr sz="1600"/>
-              <a:t>2.  RE2's util/test.h ignores --gtest_filter; all registered tests always run.</a:t>
-            </a:r>
-          </a:p>
-          <a:p>
-            <a:pPr>
-              <a:spcAft>
-                <a:spcPts val="600"/>
-              </a:spcAft>
-            </a:pPr>
-            <a:r>
-              <a:rPr sz="1600"/>
-              <a:t>    Not a bug — a constraint. Treat fixture as a combined-test baseline.</a:t>
-            </a:r>
-          </a:p>
-          <a:p>
-            <a:pPr>
-              <a:spcAft>
-                <a:spcPts val="600"/>
-              </a:spcAft>
-            </a:pPr>
-            <a:r>
-              <a:rPr sz="1600"/>
+              <a:rPr sz="1700"/>
+              <a:t>Landed:</a:t>
+            </a:r>
+          </a:p>
+          <a:p>
+            <a:pPr>
+              <a:spcAft>
+                <a:spcPts val="600"/>
+              </a:spcAft>
+            </a:pPr>
+            <a:r>
+              <a:rPr sz="1700"/>
+              <a:t>  •  cache key includes max_tokens + cache_salt (3-sample diversity is real now)</a:t>
+            </a:r>
+          </a:p>
+          <a:p>
+            <a:pPr>
+              <a:spcAft>
+                <a:spcPts val="600"/>
+              </a:spcAft>
+            </a:pPr>
+            <a:r>
+              <a:rPr sz="1700"/>
+              <a:t>  •  streaming loop-detector (two signals: window dominance + unique-window ratio)</a:t>
+            </a:r>
+          </a:p>
+          <a:p>
+            <a:pPr>
+              <a:spcAft>
+                <a:spcPts val="600"/>
+              </a:spcAft>
+            </a:pPr>
+            <a:r>
+              <a:rPr sz="1700"/>
+              <a:t>  •  5 prompt templates rewritten with real example values + OUTPUT RULES</a:t>
+            </a:r>
+          </a:p>
+          <a:p>
+            <a:pPr>
+              <a:spcAft>
+                <a:spcPts val="600"/>
+              </a:spcAft>
+            </a:pPr>
+            <a:r>
+              <a:rPr sz="1700"/>
+              <a:t>  •  strict=False cache read, extra='ignore' on PredictionResult</a:t>
+            </a:r>
+          </a:p>
+          <a:p>
+            <a:pPr>
+              <a:spcAft>
+                <a:spcPts val="600"/>
+              </a:spcAft>
+            </a:pPr>
+            <a:r>
+              <a:rPr sz="1700"/>
+              <a:t>  •  29 new unit tests, full suite 106+ green</a:t>
+            </a:r>
+          </a:p>
+          <a:p>
+            <a:pPr>
+              <a:spcAft>
+                <a:spcPts val="600"/>
+              </a:spcAft>
+            </a:pPr>
+            <a:r>
+              <a:rPr sz="1700"/>
               <a:t/>
             </a:r>
           </a:p>
@@ -8388,96 +11049,19 @@
               </a:spcAft>
             </a:pPr>
             <a:r>
-              <a:rPr sz="1600"/>
-              <a:t>3.  CoverageProfile JSON round-trip failed — writer used field names, reader</a:t>
-            </a:r>
-          </a:p>
-          <a:p>
-            <a:pPr>
-              <a:spcAft>
-                <a:spcPts val="600"/>
-              </a:spcAft>
-            </a:pPr>
-            <a:r>
-              <a:rPr sz="1600"/>
-              <a:t>    wanted the true/false aliases. Fix: populate_by_name=True on FrozenConfig.</a:t>
-            </a:r>
-          </a:p>
-          <a:p>
-            <a:pPr>
-              <a:spcAft>
-                <a:spcPts val="600"/>
-              </a:spcAft>
-            </a:pPr>
-            <a:r>
-              <a:rPr sz="1600"/>
-              <a:t/>
-            </a:r>
-          </a:p>
-          <a:p>
-            <a:pPr>
-              <a:spcAft>
-                <a:spcPts val="600"/>
-              </a:spcAft>
-            </a:pPr>
-            <a:r>
-              <a:rPr sz="1600"/>
-              <a:t>4.  llvm-cov-15 export --format=json rejected (JSON is the default).</a:t>
-            </a:r>
-          </a:p>
-          <a:p>
-            <a:pPr>
-              <a:spcAft>
-                <a:spcPts val="600"/>
-              </a:spcAft>
-            </a:pPr>
-            <a:r>
-              <a:rPr sz="1600"/>
-              <a:t>    Fix: drop the flag in run_test_coverage.py + measure_coverage.py.</a:t>
-            </a:r>
-          </a:p>
-          <a:p>
-            <a:pPr>
-              <a:spcAft>
-                <a:spcPts val="600"/>
-              </a:spcAft>
-            </a:pPr>
-            <a:r>
-              <a:rPr sz="1600"/>
-              <a:t/>
-            </a:r>
-          </a:p>
-          <a:p>
-            <a:pPr>
-              <a:spcAft>
-                <a:spcPts val="600"/>
-              </a:spcAft>
-            </a:pPr>
-            <a:r>
-              <a:rPr sz="1600"/>
-              <a:t>5.  Loop-aborted samples produced 0 seeds even when the first array entries were</a:t>
-            </a:r>
-          </a:p>
-          <a:p>
-            <a:pPr>
-              <a:spcAft>
-                <a:spcPts val="600"/>
-              </a:spcAft>
-            </a:pPr>
-            <a:r>
-              <a:rPr sz="1600"/>
-              <a:t>    complete. Fix: _salvage_objects() brace-matching scan for any balanced {…}</a:t>
-            </a:r>
-          </a:p>
-          <a:p>
-            <a:pPr>
-              <a:spcAft>
-                <a:spcPts val="600"/>
-              </a:spcAft>
-            </a:pPr>
-            <a:r>
-              <a:rPr sz="1600"/>
-              <a:t>    sub-object carrying content_b64.</a:t>
+              <a:rPr sz="1700"/>
+              <a:t>Result: 4-cell sanity run completes in ~3 min for ~$0.02.</a:t>
+            </a:r>
+          </a:p>
+          <a:p>
+            <a:pPr>
+              <a:spcAft>
+                <a:spcPts val="600"/>
+              </a:spcAft>
+            </a:pPr>
+            <a:r>
+              <a:rPr sz="1700"/>
+              <a:t>That set the stage for the first real A/B — which surfaced its own bug class.</a:t>
             </a:r>
           </a:p>
         </p:txBody>
@@ -8491,6 +11075,241 @@
 </file>
 
 <file path=ppt/slides/slide6.xml><?xml version="1.0" encoding="utf-8"?>
+<p:sld xmlns:a="http://schemas.openxmlformats.org/drawingml/2006/main" xmlns:p="http://schemas.openxmlformats.org/presentationml/2006/main" xmlns:r="http://schemas.openxmlformats.org/officeDocument/2006/relationships">
+  <p:cSld>
+    <p:spTree>
+      <p:nvGrpSpPr>
+        <p:cNvPr id="1" name=""/>
+        <p:cNvGrpSpPr/>
+        <p:nvPr/>
+      </p:nvGrpSpPr>
+      <p:grpSpPr/>
+      <p:sp>
+        <p:nvSpPr>
+          <p:cNvPr id="2" name="TextBox 1"/>
+          <p:cNvSpPr txBox="1"/>
+          <p:nvPr/>
+        </p:nvSpPr>
+        <p:spPr>
+          <a:xfrm>
+            <a:off x="457200" y="274320"/>
+            <a:ext cx="11247120" cy="822960"/>
+          </a:xfrm>
+          <a:prstGeom prst="rect">
+            <a:avLst/>
+          </a:prstGeom>
+          <a:noFill/>
+        </p:spPr>
+        <p:txBody>
+          <a:bodyPr wrap="none">
+            <a:spAutoFit/>
+          </a:bodyPr>
+          <a:lstStyle/>
+          <a:p>
+            <a:r>
+              <a:rPr sz="3200" b="1"/>
+              <a:t>First A/B surfaced five more bugs</a:t>
+            </a:r>
+          </a:p>
+        </p:txBody>
+      </p:sp>
+      <p:sp>
+        <p:nvSpPr>
+          <p:cNvPr id="3" name="TextBox 2"/>
+          <p:cNvSpPr txBox="1"/>
+          <p:nvPr/>
+        </p:nvSpPr>
+        <p:spPr>
+          <a:xfrm>
+            <a:off x="548640" y="1645920"/>
+            <a:ext cx="11155680" cy="4846320"/>
+          </a:xfrm>
+          <a:prstGeom prst="rect">
+            <a:avLst/>
+          </a:prstGeom>
+          <a:noFill/>
+        </p:spPr>
+        <p:txBody>
+          <a:bodyPr wrap="square">
+            <a:spAutoFit/>
+          </a:bodyPr>
+          <a:lstStyle/>
+          <a:p>
+            <a:pPr>
+              <a:spcAft>
+                <a:spcPts val="600"/>
+              </a:spcAft>
+            </a:pPr>
+            <a:r>
+              <a:rPr sz="1600"/>
+              <a:t>1.  Fixture tests pointed at re2_test.cc, but our build only compiled regexp_test.</a:t>
+            </a:r>
+          </a:p>
+          <a:p>
+            <a:pPr>
+              <a:spcAft>
+                <a:spcPts val="600"/>
+              </a:spcAft>
+            </a:pPr>
+            <a:r>
+              <a:rPr sz="1600"/>
+              <a:t>    Fix: swap fixture to tests that exist in the built binary.</a:t>
+            </a:r>
+          </a:p>
+          <a:p>
+            <a:pPr>
+              <a:spcAft>
+                <a:spcPts val="600"/>
+              </a:spcAft>
+            </a:pPr>
+            <a:r>
+              <a:rPr sz="1600"/>
+              <a:t/>
+            </a:r>
+          </a:p>
+          <a:p>
+            <a:pPr>
+              <a:spcAft>
+                <a:spcPts val="600"/>
+              </a:spcAft>
+            </a:pPr>
+            <a:r>
+              <a:rPr sz="1600"/>
+              <a:t>2.  RE2's util/test.h ignores --gtest_filter; all registered tests always run.</a:t>
+            </a:r>
+          </a:p>
+          <a:p>
+            <a:pPr>
+              <a:spcAft>
+                <a:spcPts val="600"/>
+              </a:spcAft>
+            </a:pPr>
+            <a:r>
+              <a:rPr sz="1600"/>
+              <a:t>    Not a bug — a constraint. Treat fixture as a combined-test baseline.</a:t>
+            </a:r>
+          </a:p>
+          <a:p>
+            <a:pPr>
+              <a:spcAft>
+                <a:spcPts val="600"/>
+              </a:spcAft>
+            </a:pPr>
+            <a:r>
+              <a:rPr sz="1600"/>
+              <a:t/>
+            </a:r>
+          </a:p>
+          <a:p>
+            <a:pPr>
+              <a:spcAft>
+                <a:spcPts val="600"/>
+              </a:spcAft>
+            </a:pPr>
+            <a:r>
+              <a:rPr sz="1600"/>
+              <a:t>3.  CoverageProfile JSON round-trip failed — writer used field names, reader</a:t>
+            </a:r>
+          </a:p>
+          <a:p>
+            <a:pPr>
+              <a:spcAft>
+                <a:spcPts val="600"/>
+              </a:spcAft>
+            </a:pPr>
+            <a:r>
+              <a:rPr sz="1600"/>
+              <a:t>    wanted the true/false aliases. Fix: populate_by_name=True on FrozenConfig.</a:t>
+            </a:r>
+          </a:p>
+          <a:p>
+            <a:pPr>
+              <a:spcAft>
+                <a:spcPts val="600"/>
+              </a:spcAft>
+            </a:pPr>
+            <a:r>
+              <a:rPr sz="1600"/>
+              <a:t/>
+            </a:r>
+          </a:p>
+          <a:p>
+            <a:pPr>
+              <a:spcAft>
+                <a:spcPts val="600"/>
+              </a:spcAft>
+            </a:pPr>
+            <a:r>
+              <a:rPr sz="1600"/>
+              <a:t>4.  llvm-cov-15 export --format=json rejected (JSON is the default).</a:t>
+            </a:r>
+          </a:p>
+          <a:p>
+            <a:pPr>
+              <a:spcAft>
+                <a:spcPts val="600"/>
+              </a:spcAft>
+            </a:pPr>
+            <a:r>
+              <a:rPr sz="1600"/>
+              <a:t>    Fix: drop the flag in run_test_coverage.py + measure_coverage.py.</a:t>
+            </a:r>
+          </a:p>
+          <a:p>
+            <a:pPr>
+              <a:spcAft>
+                <a:spcPts val="600"/>
+              </a:spcAft>
+            </a:pPr>
+            <a:r>
+              <a:rPr sz="1600"/>
+              <a:t/>
+            </a:r>
+          </a:p>
+          <a:p>
+            <a:pPr>
+              <a:spcAft>
+                <a:spcPts val="600"/>
+              </a:spcAft>
+            </a:pPr>
+            <a:r>
+              <a:rPr sz="1600"/>
+              <a:t>5.  Loop-aborted samples produced 0 seeds even when the first array entries were</a:t>
+            </a:r>
+          </a:p>
+          <a:p>
+            <a:pPr>
+              <a:spcAft>
+                <a:spcPts val="600"/>
+              </a:spcAft>
+            </a:pPr>
+            <a:r>
+              <a:rPr sz="1600"/>
+              <a:t>    complete. Fix: _salvage_objects() brace-matching scan for any balanced {…}</a:t>
+            </a:r>
+          </a:p>
+          <a:p>
+            <a:pPr>
+              <a:spcAft>
+                <a:spcPts val="600"/>
+              </a:spcAft>
+            </a:pPr>
+            <a:r>
+              <a:rPr sz="1600"/>
+              <a:t>    sub-object carrying content_b64.</a:t>
+            </a:r>
+          </a:p>
+        </p:txBody>
+      </p:sp>
+    </p:spTree>
+  </p:cSld>
+  <p:clrMapOvr>
+    <a:masterClrMapping/>
+  </p:clrMapOvr>
+</p:sld>
+</file>
+
+<file path=ppt/slides/slide7.xml><?xml version="1.0" encoding="utf-8"?>
 <p:sld xmlns:a="http://schemas.openxmlformats.org/drawingml/2006/main" xmlns:p="http://schemas.openxmlformats.org/presentationml/2006/main" xmlns:r="http://schemas.openxmlformats.org/officeDocument/2006/relationships">
   <p:cSld>
     <p:spTree>
@@ -9120,7 +11939,7 @@
 </p:sld>
 </file>
 
-<file path=ppt/slides/slide7.xml><?xml version="1.0" encoding="utf-8"?>
+<file path=ppt/slides/slide8.xml><?xml version="1.0" encoding="utf-8"?>
 <p:sld xmlns:a="http://schemas.openxmlformats.org/drawingml/2006/main" xmlns:p="http://schemas.openxmlformats.org/presentationml/2006/main" xmlns:r="http://schemas.openxmlformats.org/officeDocument/2006/relationships">
   <p:cSld>
     <p:spTree>
@@ -9361,208 +12180,6 @@
             <a:r>
               <a:rPr sz="1600"/>
               <a:t>The "loop-rate" was largely prompt/target mismatch, not model capability.</a:t>
-            </a:r>
-          </a:p>
-        </p:txBody>
-      </p:sp>
-    </p:spTree>
-  </p:cSld>
-  <p:clrMapOvr>
-    <a:masterClrMapping/>
-  </p:clrMapOvr>
-</p:sld>
-</file>
-
-<file path=ppt/slides/slide8.xml><?xml version="1.0" encoding="utf-8"?>
-<p:sld xmlns:a="http://schemas.openxmlformats.org/drawingml/2006/main" xmlns:p="http://schemas.openxmlformats.org/presentationml/2006/main" xmlns:r="http://schemas.openxmlformats.org/officeDocument/2006/relationships">
-  <p:cSld>
-    <p:spTree>
-      <p:nvGrpSpPr>
-        <p:cNvPr id="1" name=""/>
-        <p:cNvGrpSpPr/>
-        <p:nvPr/>
-      </p:nvGrpSpPr>
-      <p:grpSpPr/>
-      <p:sp>
-        <p:nvSpPr>
-          <p:cNvPr id="2" name="TextBox 1"/>
-          <p:cNvSpPr txBox="1"/>
-          <p:nvPr/>
-        </p:nvSpPr>
-        <p:spPr>
-          <a:xfrm>
-            <a:off x="457200" y="274320"/>
-            <a:ext cx="11247120" cy="822960"/>
-          </a:xfrm>
-          <a:prstGeom prst="rect">
-            <a:avLst/>
-          </a:prstGeom>
-          <a:noFill/>
-        </p:spPr>
-        <p:txBody>
-          <a:bodyPr wrap="none">
-            <a:spAutoFit/>
-          </a:bodyPr>
-          <a:lstStyle/>
-          <a:p>
-            <a:r>
-              <a:rPr sz="3200" b="1"/>
-              <a:t>Fix — rewrite prompts to emit regex text (2026-04-13)</a:t>
-            </a:r>
-          </a:p>
-        </p:txBody>
-      </p:sp>
-      <p:sp>
-        <p:nvSpPr>
-          <p:cNvPr id="3" name="TextBox 2"/>
-          <p:cNvSpPr txBox="1"/>
-          <p:nvPr/>
-        </p:nvSpPr>
-        <p:spPr>
-          <a:xfrm>
-            <a:off x="548640" y="1645920"/>
-            <a:ext cx="11155680" cy="4846320"/>
-          </a:xfrm>
-          <a:prstGeom prst="rect">
-            <a:avLst/>
-          </a:prstGeom>
-          <a:noFill/>
-        </p:spPr>
-        <p:txBody>
-          <a:bodyPr wrap="square">
-            <a:spAutoFit/>
-          </a:bodyPr>
-          <a:lstStyle/>
-          <a:p>
-            <a:pPr>
-              <a:spcAft>
-                <a:spcPts val="600"/>
-              </a:spcAft>
-            </a:pPr>
-            <a:r>
-              <a:rPr sz="1600"/>
-              <a:t>New Jinja templates:</a:t>
-            </a:r>
-          </a:p>
-          <a:p>
-            <a:pPr>
-              <a:spcAft>
-                <a:spcPts val="600"/>
-              </a:spcAft>
-            </a:pPr>
-            <a:r>
-              <a:rPr sz="1600"/>
-              <a:t>  •  prediction/prompts/input_synthesis_regex.j2        (gap-targeted)</a:t>
-            </a:r>
-          </a:p>
-          <a:p>
-            <a:pPr>
-              <a:spcAft>
-                <a:spcPts val="600"/>
-              </a:spcAft>
-            </a:pPr>
-            <a:r>
-              <a:rPr sz="1600"/>
-              <a:t>  •  synthesis/prompts/source_only_synthesis_regex.j2  (source-only)</a:t>
-            </a:r>
-          </a:p>
-          <a:p>
-            <a:pPr>
-              <a:spcAft>
-                <a:spcPts val="600"/>
-              </a:spcAft>
-            </a:pPr>
-            <a:r>
-              <a:rPr sz="1600"/>
-              <a:t/>
-            </a:r>
-          </a:p>
-          <a:p>
-            <a:pPr>
-              <a:spcAft>
-                <a:spcPts val="600"/>
-              </a:spcAft>
-            </a:pPr>
-            <a:r>
-              <a:rPr sz="1600"/>
-              <a:t>New parser  parse_regex_response()  in synthesis/scripts/parse_synthesis.py:</a:t>
-            </a:r>
-          </a:p>
-          <a:p>
-            <a:pPr>
-              <a:spcAft>
-                <a:spcPts val="600"/>
-              </a:spcAft>
-            </a:pPr>
-            <a:r>
-              <a:rPr sz="1600"/>
-              <a:t>  •  extracts  { "regexes": [ { "regex": str, "target_gaps": [...], … }, … ] }</a:t>
-            </a:r>
-          </a:p>
-          <a:p>
-            <a:pPr>
-              <a:spcAft>
-                <a:spcPts val="600"/>
-              </a:spcAft>
-            </a:pPr>
-            <a:r>
-              <a:rPr sz="1600"/>
-              <a:t>  •  prepends 2 sha256-seeded flag bytes keyed by (target, sample, idx, regex)</a:t>
-            </a:r>
-          </a:p>
-          <a:p>
-            <a:pPr>
-              <a:spcAft>
-                <a:spcPts val="600"/>
-              </a:spcAft>
-            </a:pPr>
-            <a:r>
-              <a:rPr sz="1600"/>
-              <a:t>  •  UTF-8 encode with codepoint-boundary-safe truncation</a:t>
-            </a:r>
-          </a:p>
-          <a:p>
-            <a:pPr>
-              <a:spcAft>
-                <a:spcPts val="600"/>
-              </a:spcAft>
-            </a:pPr>
-            <a:r>
-              <a:rPr sz="1600"/>
-              <a:t>  •  clip total bytes to RE2's [3, 64] window, dedupe</a:t>
-            </a:r>
-          </a:p>
-          <a:p>
-            <a:pPr>
-              <a:spcAft>
-                <a:spcPts val="600"/>
-              </a:spcAft>
-            </a:pPr>
-            <a:r>
-              <a:rPr sz="1600"/>
-              <a:t/>
-            </a:r>
-          </a:p>
-          <a:p>
-            <a:pPr>
-              <a:spcAft>
-                <a:spcPts val="600"/>
-              </a:spcAft>
-            </a:pPr>
-            <a:r>
-              <a:rPr sz="1600"/>
-              <a:t>New CLI flag  --input-format {bytes,regex}  on both generators routes</a:t>
-            </a:r>
-          </a:p>
-          <a:p>
-            <a:pPr>
-              <a:spcAft>
-                <a:spcPts val="600"/>
-              </a:spcAft>
-            </a:pPr>
-            <a:r>
-              <a:rPr sz="1600"/>
-              <a:t>the template + parser pair. Old bytes outputs archived under *_bytes_v1/.</a:t>
             </a:r>
           </a:p>
         </p:txBody>
@@ -9609,7 +12226,7 @@
           <a:p>
             <a:r>
               <a:rPr sz="3200" b="1"/>
-              <a:t>Second A/B result — regex-format prompt (2026-04-13)</a:t>
+              <a:t>Fix — rewrite prompts to emit regex text (2026-04-13)</a:t>
             </a:r>
           </a:p>
         </p:txBody>
@@ -9622,534 +12239,7 @@
         </p:nvSpPr>
         <p:spPr>
           <a:xfrm>
-            <a:off x="457200" y="1051560"/>
-            <a:ext cx="11247120" cy="457200"/>
-          </a:xfrm>
-          <a:prstGeom prst="rect">
-            <a:avLst/>
-          </a:prstGeom>
-          <a:noFill/>
-        </p:spPr>
-        <p:txBody>
-          <a:bodyPr wrap="none">
-            <a:spAutoFit/>
-          </a:bodyPr>
-          <a:lstStyle/>
-          <a:p>
-            <a:r>
-              <a:rPr sz="1600" b="0"/>
-              <a:t>Same target, same fixture, same model. Only prompt + parser changed.</a:t>
-            </a:r>
-          </a:p>
-        </p:txBody>
-      </p:sp>
-      <p:graphicFrame>
-        <p:nvGraphicFramePr>
-          <p:cNvPr id="4" name="Table 3"/>
-          <p:cNvGraphicFramePr>
-            <a:graphicFrameLocks noGrp="1"/>
-          </p:cNvGraphicFramePr>
-          <p:nvPr/>
-        </p:nvGraphicFramePr>
-        <p:xfrm>
-          <a:off x="731520" y="1828800"/>
-          <a:ext cx="10515600" cy="2926080"/>
-        </p:xfrm>
-        <a:graphic>
-          <a:graphicData uri="http://schemas.openxmlformats.org/drawingml/2006/table">
-            <a:tbl>
-              <a:tblPr firstRow="1" bandRow="1">
-                <a:tableStyleId>{5C22544A-7EE6-4342-B048-85BDC9FD1C3A}</a:tableStyleId>
-              </a:tblPr>
-              <a:tblGrid>
-                <a:gridCol w="2103120"/>
-                <a:gridCol w="2103120"/>
-                <a:gridCol w="2103120"/>
-                <a:gridCol w="2103120"/>
-                <a:gridCol w="2103120"/>
-              </a:tblGrid>
-              <a:tr h="418011">
-                <a:tc>
-                  <a:txBody>
-                    <a:bodyPr/>
-                    <a:lstStyle/>
-                    <a:p>
-                      <a:r>
-                        <a:rPr sz="1600" b="1"/>
-                        <a:t>metric</a:t>
-                      </a:r>
-                    </a:p>
-                  </a:txBody>
-                  <a:tcPr/>
-                </a:tc>
-                <a:tc>
-                  <a:txBody>
-                    <a:bodyPr/>
-                    <a:lstStyle/>
-                    <a:p>
-                      <a:r>
-                        <a:rPr sz="1600" b="1"/>
-                        <a:t>exp1 (gap)</a:t>
-                      </a:r>
-                    </a:p>
-                  </a:txBody>
-                  <a:tcPr/>
-                </a:tc>
-                <a:tc>
-                  <a:txBody>
-                    <a:bodyPr/>
-                    <a:lstStyle/>
-                    <a:p>
-                      <a:r>
-                        <a:rPr sz="1600" b="1"/>
-                        <a:t>exp2 (source)</a:t>
-                      </a:r>
-                    </a:p>
-                  </a:txBody>
-                  <a:tcPr/>
-                </a:tc>
-                <a:tc>
-                  <a:txBody>
-                    <a:bodyPr/>
-                    <a:lstStyle/>
-                    <a:p>
-                      <a:r>
-                        <a:rPr sz="1600" b="1"/>
-                        <a:t>union</a:t>
-                      </a:r>
-                    </a:p>
-                  </a:txBody>
-                  <a:tcPr/>
-                </a:tc>
-                <a:tc>
-                  <a:txBody>
-                    <a:bodyPr/>
-                    <a:lstStyle/>
-                    <a:p>
-                      <a:r>
-                        <a:rPr sz="1600" b="1"/>
-                        <a:t>intersection</a:t>
-                      </a:r>
-                    </a:p>
-                  </a:txBody>
-                  <a:tcPr/>
-                </a:tc>
-              </a:tr>
-              <a:tr h="418011">
-                <a:tc>
-                  <a:txBody>
-                    <a:bodyPr/>
-                    <a:lstStyle/>
-                    <a:p>
-                      <a:r>
-                        <a:rPr sz="1600"/>
-                        <a:t>seeds produced</a:t>
-                      </a:r>
-                    </a:p>
-                  </a:txBody>
-                  <a:tcPr/>
-                </a:tc>
-                <a:tc>
-                  <a:txBody>
-                    <a:bodyPr/>
-                    <a:lstStyle/>
-                    <a:p>
-                      <a:r>
-                        <a:rPr sz="1600"/>
-                        <a:t>20</a:t>
-                      </a:r>
-                    </a:p>
-                  </a:txBody>
-                  <a:tcPr/>
-                </a:tc>
-                <a:tc>
-                  <a:txBody>
-                    <a:bodyPr/>
-                    <a:lstStyle/>
-                    <a:p>
-                      <a:r>
-                        <a:rPr sz="1600"/>
-                        <a:t>30</a:t>
-                      </a:r>
-                    </a:p>
-                  </a:txBody>
-                  <a:tcPr/>
-                </a:tc>
-                <a:tc>
-                  <a:txBody>
-                    <a:bodyPr/>
-                    <a:lstStyle/>
-                    <a:p>
-                      <a:r>
-                        <a:rPr sz="1600"/>
-                        <a:t>—</a:t>
-                      </a:r>
-                    </a:p>
-                  </a:txBody>
-                  <a:tcPr/>
-                </a:tc>
-                <a:tc>
-                  <a:txBody>
-                    <a:bodyPr/>
-                    <a:lstStyle/>
-                    <a:p>
-                      <a:r>
-                        <a:rPr sz="1600"/>
-                        <a:t>—</a:t>
-                      </a:r>
-                    </a:p>
-                  </a:txBody>
-                  <a:tcPr/>
-                </a:tc>
-              </a:tr>
-              <a:tr h="418011">
-                <a:tc>
-                  <a:txBody>
-                    <a:bodyPr/>
-                    <a:lstStyle/>
-                    <a:p>
-                      <a:r>
-                        <a:rPr sz="1600"/>
-                        <a:t>ok samples / total</a:t>
-                      </a:r>
-                    </a:p>
-                  </a:txBody>
-                  <a:tcPr/>
-                </a:tc>
-                <a:tc>
-                  <a:txBody>
-                    <a:bodyPr/>
-                    <a:lstStyle/>
-                    <a:p>
-                      <a:r>
-                        <a:rPr sz="1600"/>
-                        <a:t>2 / 3</a:t>
-                      </a:r>
-                    </a:p>
-                  </a:txBody>
-                  <a:tcPr/>
-                </a:tc>
-                <a:tc>
-                  <a:txBody>
-                    <a:bodyPr/>
-                    <a:lstStyle/>
-                    <a:p>
-                      <a:r>
-                        <a:rPr sz="1600"/>
-                        <a:t>3 / 3</a:t>
-                      </a:r>
-                    </a:p>
-                  </a:txBody>
-                  <a:tcPr/>
-                </a:tc>
-                <a:tc>
-                  <a:txBody>
-                    <a:bodyPr/>
-                    <a:lstStyle/>
-                    <a:p>
-                      <a:r>
-                        <a:rPr sz="1600"/>
-                        <a:t>—</a:t>
-                      </a:r>
-                    </a:p>
-                  </a:txBody>
-                  <a:tcPr/>
-                </a:tc>
-                <a:tc>
-                  <a:txBody>
-                    <a:bodyPr/>
-                    <a:lstStyle/>
-                    <a:p>
-                      <a:r>
-                        <a:rPr sz="1600"/>
-                        <a:t>—</a:t>
-                      </a:r>
-                    </a:p>
-                  </a:txBody>
-                  <a:tcPr/>
-                </a:tc>
-              </a:tr>
-              <a:tr h="418011">
-                <a:tc>
-                  <a:txBody>
-                    <a:bodyPr/>
-                    <a:lstStyle/>
-                    <a:p>
-                      <a:r>
-                        <a:rPr sz="1600"/>
-                        <a:t>edges covered</a:t>
-                      </a:r>
-                    </a:p>
-                  </a:txBody>
-                  <a:tcPr/>
-                </a:tc>
-                <a:tc>
-                  <a:txBody>
-                    <a:bodyPr/>
-                    <a:lstStyle/>
-                    <a:p>
-                      <a:r>
-                        <a:rPr sz="1600"/>
-                        <a:t>1243</a:t>
-                      </a:r>
-                    </a:p>
-                  </a:txBody>
-                  <a:tcPr/>
-                </a:tc>
-                <a:tc>
-                  <a:txBody>
-                    <a:bodyPr/>
-                    <a:lstStyle/>
-                    <a:p>
-                      <a:r>
-                        <a:rPr sz="1600"/>
-                        <a:t>1133</a:t>
-                      </a:r>
-                    </a:p>
-                  </a:txBody>
-                  <a:tcPr/>
-                </a:tc>
-                <a:tc>
-                  <a:txBody>
-                    <a:bodyPr/>
-                    <a:lstStyle/>
-                    <a:p>
-                      <a:r>
-                        <a:rPr sz="1600"/>
-                        <a:t>1308</a:t>
-                      </a:r>
-                    </a:p>
-                  </a:txBody>
-                  <a:tcPr/>
-                </a:tc>
-                <a:tc>
-                  <a:txBody>
-                    <a:bodyPr/>
-                    <a:lstStyle/>
-                    <a:p>
-                      <a:r>
-                        <a:rPr sz="1600"/>
-                        <a:t>1068</a:t>
-                      </a:r>
-                    </a:p>
-                  </a:txBody>
-                  <a:tcPr/>
-                </a:tc>
-              </a:tr>
-              <a:tr h="418011">
-                <a:tc>
-                  <a:txBody>
-                    <a:bodyPr/>
-                    <a:lstStyle/>
-                    <a:p>
-                      <a:r>
-                        <a:rPr sz="1600"/>
-                        <a:t>lines covered</a:t>
-                      </a:r>
-                    </a:p>
-                  </a:txBody>
-                  <a:tcPr/>
-                </a:tc>
-                <a:tc>
-                  <a:txBody>
-                    <a:bodyPr/>
-                    <a:lstStyle/>
-                    <a:p>
-                      <a:r>
-                        <a:rPr sz="1600"/>
-                        <a:t>2530</a:t>
-                      </a:r>
-                    </a:p>
-                  </a:txBody>
-                  <a:tcPr/>
-                </a:tc>
-                <a:tc>
-                  <a:txBody>
-                    <a:bodyPr/>
-                    <a:lstStyle/>
-                    <a:p>
-                      <a:r>
-                        <a:rPr sz="1600"/>
-                        <a:t>2385</a:t>
-                      </a:r>
-                    </a:p>
-                  </a:txBody>
-                  <a:tcPr/>
-                </a:tc>
-                <a:tc>
-                  <a:txBody>
-                    <a:bodyPr/>
-                    <a:lstStyle/>
-                    <a:p>
-                      <a:r>
-                        <a:rPr sz="1600"/>
-                        <a:t>2661</a:t>
-                      </a:r>
-                    </a:p>
-                  </a:txBody>
-                  <a:tcPr/>
-                </a:tc>
-                <a:tc>
-                  <a:txBody>
-                    <a:bodyPr/>
-                    <a:lstStyle/>
-                    <a:p>
-                      <a:r>
-                        <a:rPr sz="1600"/>
-                        <a:t>2254</a:t>
-                      </a:r>
-                    </a:p>
-                  </a:txBody>
-                  <a:tcPr/>
-                </a:tc>
-              </a:tr>
-              <a:tr h="418011">
-                <a:tc>
-                  <a:txBody>
-                    <a:bodyPr/>
-                    <a:lstStyle/>
-                    <a:p>
-                      <a:r>
-                        <a:rPr sz="1600"/>
-                        <a:t>edges ONLY in this cell</a:t>
-                      </a:r>
-                    </a:p>
-                  </a:txBody>
-                  <a:tcPr/>
-                </a:tc>
-                <a:tc>
-                  <a:txBody>
-                    <a:bodyPr/>
-                    <a:lstStyle/>
-                    <a:p>
-                      <a:r>
-                        <a:rPr sz="1600"/>
-                        <a:t>175</a:t>
-                      </a:r>
-                    </a:p>
-                  </a:txBody>
-                  <a:tcPr/>
-                </a:tc>
-                <a:tc>
-                  <a:txBody>
-                    <a:bodyPr/>
-                    <a:lstStyle/>
-                    <a:p>
-                      <a:r>
-                        <a:rPr sz="1600"/>
-                        <a:t>65</a:t>
-                      </a:r>
-                    </a:p>
-                  </a:txBody>
-                  <a:tcPr/>
-                </a:tc>
-                <a:tc>
-                  <a:txBody>
-                    <a:bodyPr/>
-                    <a:lstStyle/>
-                    <a:p>
-                      <a:r>
-                        <a:rPr sz="1600"/>
-                        <a:t>—</a:t>
-                      </a:r>
-                    </a:p>
-                  </a:txBody>
-                  <a:tcPr/>
-                </a:tc>
-                <a:tc>
-                  <a:txBody>
-                    <a:bodyPr/>
-                    <a:lstStyle/>
-                    <a:p>
-                      <a:r>
-                        <a:rPr sz="1600"/>
-                        <a:t>—</a:t>
-                      </a:r>
-                    </a:p>
-                  </a:txBody>
-                  <a:tcPr/>
-                </a:tc>
-              </a:tr>
-              <a:tr h="418014">
-                <a:tc>
-                  <a:txBody>
-                    <a:bodyPr/>
-                    <a:lstStyle/>
-                    <a:p>
-                      <a:r>
-                        <a:rPr sz="1600"/>
-                        <a:t>Jaccard (edges)</a:t>
-                      </a:r>
-                    </a:p>
-                  </a:txBody>
-                  <a:tcPr/>
-                </a:tc>
-                <a:tc>
-                  <a:txBody>
-                    <a:bodyPr/>
-                    <a:lstStyle/>
-                    <a:p>
-                      <a:r>
-                        <a:rPr sz="1600"/>
-                        <a:t>—</a:t>
-                      </a:r>
-                    </a:p>
-                  </a:txBody>
-                  <a:tcPr/>
-                </a:tc>
-                <a:tc>
-                  <a:txBody>
-                    <a:bodyPr/>
-                    <a:lstStyle/>
-                    <a:p>
-                      <a:r>
-                        <a:rPr sz="1600"/>
-                        <a:t>—</a:t>
-                      </a:r>
-                    </a:p>
-                  </a:txBody>
-                  <a:tcPr/>
-                </a:tc>
-                <a:tc>
-                  <a:txBody>
-                    <a:bodyPr/>
-                    <a:lstStyle/>
-                    <a:p>
-                      <a:r>
-                        <a:rPr sz="1600"/>
-                        <a:t>0.817</a:t>
-                      </a:r>
-                    </a:p>
-                  </a:txBody>
-                  <a:tcPr/>
-                </a:tc>
-                <a:tc>
-                  <a:txBody>
-                    <a:bodyPr/>
-                    <a:lstStyle/>
-                    <a:p>
-                      <a:r>
-                        <a:rPr sz="1600"/>
-                        <a:t>—</a:t>
-                      </a:r>
-                    </a:p>
-                  </a:txBody>
-                  <a:tcPr/>
-                </a:tc>
-              </a:tr>
-            </a:tbl>
-          </a:graphicData>
-        </a:graphic>
-      </p:graphicFrame>
-      <p:sp>
-        <p:nvSpPr>
-          <p:cNvPr id="5" name="TextBox 4"/>
-          <p:cNvSpPr txBox="1"/>
-          <p:nvPr/>
-        </p:nvSpPr>
-        <p:spPr>
-          <a:xfrm>
-            <a:off x="548640" y="4937760"/>
+            <a:off x="548640" y="1645920"/>
             <a:ext cx="11155680" cy="4846320"/>
           </a:xfrm>
           <a:prstGeom prst="rect">
@@ -10169,19 +12259,129 @@
               </a:spcAft>
             </a:pPr>
             <a:r>
-              <a:rPr sz="1700"/>
-              <a:t>Coverage per cell roughly tripled.    Loop-abort rate 5/6 → 1/6.</a:t>
-            </a:r>
-          </a:p>
-          <a:p>
-            <a:pPr>
-              <a:spcAft>
-                <a:spcPts val="600"/>
-              </a:spcAft>
-            </a:pPr>
-            <a:r>
-              <a:rPr sz="1700"/>
-              <a:t>Exp1 (gap-targeted) now wins by +110 edges and 175 vs 65 exclusive.</a:t>
+              <a:rPr sz="1600"/>
+              <a:t>New Jinja templates:</a:t>
+            </a:r>
+          </a:p>
+          <a:p>
+            <a:pPr>
+              <a:spcAft>
+                <a:spcPts val="600"/>
+              </a:spcAft>
+            </a:pPr>
+            <a:r>
+              <a:rPr sz="1600"/>
+              <a:t>  •  prediction/prompts/input_synthesis_regex.j2        (gap-targeted)</a:t>
+            </a:r>
+          </a:p>
+          <a:p>
+            <a:pPr>
+              <a:spcAft>
+                <a:spcPts val="600"/>
+              </a:spcAft>
+            </a:pPr>
+            <a:r>
+              <a:rPr sz="1600"/>
+              <a:t>  •  synthesis/prompts/source_only_synthesis_regex.j2  (source-only)</a:t>
+            </a:r>
+          </a:p>
+          <a:p>
+            <a:pPr>
+              <a:spcAft>
+                <a:spcPts val="600"/>
+              </a:spcAft>
+            </a:pPr>
+            <a:r>
+              <a:rPr sz="1600"/>
+              <a:t/>
+            </a:r>
+          </a:p>
+          <a:p>
+            <a:pPr>
+              <a:spcAft>
+                <a:spcPts val="600"/>
+              </a:spcAft>
+            </a:pPr>
+            <a:r>
+              <a:rPr sz="1600"/>
+              <a:t>New parser  parse_regex_response()  in synthesis/scripts/parse_synthesis.py:</a:t>
+            </a:r>
+          </a:p>
+          <a:p>
+            <a:pPr>
+              <a:spcAft>
+                <a:spcPts val="600"/>
+              </a:spcAft>
+            </a:pPr>
+            <a:r>
+              <a:rPr sz="1600"/>
+              <a:t>  •  extracts  { "regexes": [ { "regex": str, "target_gaps": [...], … }, … ] }</a:t>
+            </a:r>
+          </a:p>
+          <a:p>
+            <a:pPr>
+              <a:spcAft>
+                <a:spcPts val="600"/>
+              </a:spcAft>
+            </a:pPr>
+            <a:r>
+              <a:rPr sz="1600"/>
+              <a:t>  •  prepends 2 sha256-seeded flag bytes keyed by (target, sample, idx, regex)</a:t>
+            </a:r>
+          </a:p>
+          <a:p>
+            <a:pPr>
+              <a:spcAft>
+                <a:spcPts val="600"/>
+              </a:spcAft>
+            </a:pPr>
+            <a:r>
+              <a:rPr sz="1600"/>
+              <a:t>  •  UTF-8 encode with codepoint-boundary-safe truncation</a:t>
+            </a:r>
+          </a:p>
+          <a:p>
+            <a:pPr>
+              <a:spcAft>
+                <a:spcPts val="600"/>
+              </a:spcAft>
+            </a:pPr>
+            <a:r>
+              <a:rPr sz="1600"/>
+              <a:t>  •  clip total bytes to RE2's [3, 64] window, dedupe</a:t>
+            </a:r>
+          </a:p>
+          <a:p>
+            <a:pPr>
+              <a:spcAft>
+                <a:spcPts val="600"/>
+              </a:spcAft>
+            </a:pPr>
+            <a:r>
+              <a:rPr sz="1600"/>
+              <a:t/>
+            </a:r>
+          </a:p>
+          <a:p>
+            <a:pPr>
+              <a:spcAft>
+                <a:spcPts val="600"/>
+              </a:spcAft>
+            </a:pPr>
+            <a:r>
+              <a:rPr sz="1600"/>
+              <a:t>New CLI flag  --input-format {bytes,regex}  on both generators routes</a:t>
+            </a:r>
+          </a:p>
+          <a:p>
+            <a:pPr>
+              <a:spcAft>
+                <a:spcPts val="600"/>
+              </a:spcAft>
+            </a:pPr>
+            <a:r>
+              <a:rPr sz="1600"/>
+              <a:t>the template + parser pair. Old bytes outputs archived under *_bytes_v1/.</a:t>
             </a:r>
           </a:p>
         </p:txBody>
